--- a/Topic_A/Exam_Practice/AT-A-L12_Speaking_Workshop_Topic_A_Review_and_Assessment.pptx
+++ b/Topic_A/Exam_Practice/AT-A-L12_Speaking_Workshop_Topic_A_Review_and_Assessment.pptx
@@ -615,7 +615,11 @@
           <a:lstStyle/>
           <a:p>
             <a:r>
-              <a:rPr lang="en-US" dirty="0"/>
+              <a:rPr lang="ar-SA" dirty="0">
+                <a:latin typeface="Amiri" pitchFamily="2" charset="-78"/>
+                <a:ea typeface="Amiri" pitchFamily="2" charset="-78"/>
+                <a:cs typeface="Amiri" pitchFamily="2" charset="-78"/>
+              </a:rPr>
               <a:t>ROLE PLAY C (Develop) — at the pharmacy abroad.
 SET-UP IN THE BREAKOUT ROOM: A = examiner (reads the left column ONLY — the questions, in order), B = candidate (sees the task column; Core may use the help column), C = observer (ticks the feedback checklist). 1 minute preparation, about 3 minutes speaking, 1 minute feedback, then rotate.
 Task ! is the unexpected question: in the exam the candidate has not seen it — the examiner should read it without warning.
@@ -707,7 +711,11 @@
           <a:lstStyle/>
           <a:p>
             <a:r>
-              <a:rPr lang="en-US" dirty="0"/>
+              <a:rPr lang="ar-SA" dirty="0">
+                <a:latin typeface="Amiri" pitchFamily="2" charset="-78"/>
+                <a:ea typeface="Amiri" pitchFamily="2" charset="-78"/>
+                <a:cs typeface="Amiri" pitchFamily="2" charset="-78"/>
+              </a:rPr>
               <a:t>ROLE PLAY D (Stretch) — a school debate.
 SET-UP IN THE BREAKOUT ROOM: A = examiner (reads the left column ONLY — the questions, in order), B = candidate (sees the task column; Core may use the help column), C = observer (ticks the feedback checklist). 1 minute preparation, about 3 minutes speaking, 1 minute feedback, then rotate.
 Task ! is the unexpected question: in the exam the candidate has not seen it — the examiner should read it without warning.
@@ -1243,7 +1251,11 @@
           <a:lstStyle/>
           <a:p>
             <a:r>
-              <a:rPr lang="en-US" dirty="0"/>
+              <a:rPr lang="ar-SA" dirty="0">
+                <a:latin typeface="Amiri" pitchFamily="2" charset="-78"/>
+                <a:ea typeface="Amiri" pitchFamily="2" charset="-78"/>
+                <a:cs typeface="Amiri" pitchFamily="2" charset="-78"/>
+              </a:rPr>
               <a:t>TOPIC CONVERSATION — Core. Examiner asks the questions in order and may add “لِمَاذَا؟ / هَلْ يُمْكِنُ أَنْ تَشْرَحَ أَكْثَرَ؟” to push for more. Candidate aims for one full sentence per question.
 </a:t>
             </a:r>
@@ -1332,7 +1344,11 @@
           <a:lstStyle/>
           <a:p>
             <a:r>
-              <a:rPr lang="en-US" dirty="0"/>
+              <a:rPr lang="ar-SA" dirty="0">
+                <a:latin typeface="Amiri" pitchFamily="2" charset="-78"/>
+                <a:ea typeface="Amiri" pitchFamily="2" charset="-78"/>
+                <a:cs typeface="Amiri" pitchFamily="2" charset="-78"/>
+              </a:rPr>
               <a:t>TOPIC CONVERSATION — Develop. Examiner asks the questions in order and may add “لِمَاذَا؟ / هَلْ يُمْكِنُ أَنْ تَشْرَحَ أَكْثَرَ؟” to push for more. Candidate aims for two or three sentences, mixing time frames.
 </a:t>
             </a:r>
@@ -1421,7 +1437,11 @@
           <a:lstStyle/>
           <a:p>
             <a:r>
-              <a:rPr lang="en-US" dirty="0"/>
+              <a:rPr lang="ar-SA" dirty="0">
+                <a:latin typeface="Amiri" pitchFamily="2" charset="-78"/>
+                <a:ea typeface="Amiri" pitchFamily="2" charset="-78"/>
+                <a:cs typeface="Amiri" pitchFamily="2" charset="-78"/>
+              </a:rPr>
               <a:t>TOPIC CONVERSATION — Stretch. Examiner asks the questions in order and may add “لِمَاذَا؟ / هَلْ يُمْكِنُ أَنْ تَشْرَحَ أَكْثَرَ؟” to push for more. Candidate aims for a developed answer: opinion, comparison, concession and a conditional.
 </a:t>
             </a:r>
@@ -1510,7 +1530,11 @@
           <a:lstStyle/>
           <a:p>
             <a:r>
-              <a:rPr lang="en-US" dirty="0"/>
+              <a:rPr lang="ar-SA" dirty="0">
+                <a:latin typeface="Amiri" pitchFamily="2" charset="-78"/>
+                <a:ea typeface="Amiri" pitchFamily="2" charset="-78"/>
+                <a:cs typeface="Amiri" pitchFamily="2" charset="-78"/>
+              </a:rPr>
               <a:t>WELCOME (1 min) — while students join.
 • Greet each student by name as they arrive: السَّلَامُ عَلَيْكُمْ. Take the register (Pastoral Tracker: attendance 0/1).
 • 2-MINUTE CHECK-IN (SEND training): a private chat to any student who seemed unsettled last lesson — “Are you okay today? 👍 / 👎”.
@@ -2224,7 +2248,11 @@
           <a:lstStyle/>
           <a:p>
             <a:r>
-              <a:rPr lang="en-US" dirty="0"/>
+              <a:rPr lang="ar-SA" dirty="0">
+                <a:latin typeface="Amiri" pitchFamily="2" charset="-78"/>
+                <a:ea typeface="Amiri" pitchFamily="2" charset="-78"/>
+                <a:cs typeface="Amiri" pitchFamily="2" charset="-78"/>
+              </a:rPr>
               <a:t>TEACH (3 min). Role play = precise and complete; conversation = develop. Choral repetition of the repair phrases. To a girl: تُعِيدِي.</a:t>
             </a:r>
             <a:endParaRPr lang="en-US" dirty="0"/>
@@ -2576,7 +2604,11 @@
           <a:lstStyle/>
           <a:p>
             <a:r>
-              <a:rPr lang="en-US" dirty="0"/>
+              <a:rPr lang="ar-SA" dirty="0">
+                <a:latin typeface="Amiri" pitchFamily="2" charset="-78"/>
+                <a:ea typeface="Amiri" pitchFamily="2" charset="-78"/>
+                <a:cs typeface="Amiri" pitchFamily="2" charset="-78"/>
+              </a:rPr>
               <a:t>ROLE PLAY A (Core) — a host family.
 SET-UP IN THE BREAKOUT ROOM: A = examiner (reads the left column ONLY — the questions, in order), B = candidate (sees the task column; Core may use the help column), C = observer (ticks the feedback checklist). 1 minute preparation, about 3 minutes speaking, 1 minute feedback, then rotate.
 Task ! is the unexpected question: in the exam the candidate has not seen it — the examiner should read it without warning.
@@ -2668,7 +2700,11 @@
           <a:lstStyle/>
           <a:p>
             <a:r>
-              <a:rPr lang="en-US" dirty="0"/>
+              <a:rPr lang="ar-SA" dirty="0">
+                <a:latin typeface="Amiri" pitchFamily="2" charset="-78"/>
+                <a:ea typeface="Amiri" pitchFamily="2" charset="-78"/>
+                <a:cs typeface="Amiri" pitchFamily="2" charset="-78"/>
+              </a:rPr>
               <a:t>ROLE PLAY B (Core+) — in a restaurant.
 SET-UP IN THE BREAKOUT ROOM: A = examiner (reads the left column ONLY — the questions, in order), B = candidate (sees the task column; Core may use the help column), C = observer (ticks the feedback checklist). 1 minute preparation, about 3 minutes speaking, 1 minute feedback, then rotate.
 Task ! is the unexpected question: in the exam the candidate has not seen it — the examiner should read it without warning.
@@ -3156,6 +3192,7 @@
                   <a:srgbClr val="D4AF37"/>
                 </a:solidFill>
                 <a:latin typeface="Amiri" pitchFamily="2" charset="-78"/>
+                <a:ea typeface="Amiri" pitchFamily="2" charset="-78"/>
                 <a:cs typeface="Amiri" pitchFamily="2" charset="-78"/>
               </a:rPr>
               <a:t>م</a:t>
@@ -3362,6 +3399,7 @@
                   <a:srgbClr val="D4AF37"/>
                 </a:solidFill>
                 <a:latin typeface="Amiri" pitchFamily="2" charset="-78"/>
+                <a:ea typeface="Amiri" pitchFamily="2" charset="-78"/>
                 <a:cs typeface="Amiri" pitchFamily="2" charset="-78"/>
               </a:rPr>
               <a:t>وَرْشَةُ التَّحَدُّثِ — امْتِحَانٌ تَجْرِيبِيٌّ</a:t>
@@ -3819,6 +3857,7 @@
                   <a:srgbClr val="D4AF37"/>
                 </a:solidFill>
                 <a:latin typeface="Amiri" pitchFamily="2" charset="-78"/>
+                <a:ea typeface="Amiri" pitchFamily="2" charset="-78"/>
                 <a:cs typeface="Amiri" pitchFamily="2" charset="-78"/>
               </a:rPr>
               <a:t>م</a:t>
@@ -4139,6 +4178,7 @@
                   <a:srgbClr val="8A6D1E"/>
                 </a:solidFill>
                 <a:latin typeface="Amiri" pitchFamily="2" charset="-78"/>
+                <a:ea typeface="Amiri" pitchFamily="2" charset="-78"/>
                 <a:cs typeface="Amiri" pitchFamily="2" charset="-78"/>
               </a:rPr>
               <a:t>مَرِيضٌ فِي العُطْلَةِ</a:t>
@@ -4419,6 +4459,7 @@
                   <a:srgbClr val="1B3B6F"/>
                 </a:solidFill>
                 <a:latin typeface="Amiri" pitchFamily="2" charset="-78"/>
+                <a:ea typeface="Amiri" pitchFamily="2" charset="-78"/>
                 <a:cs typeface="Amiri" pitchFamily="2" charset="-78"/>
               </a:rPr>
               <a:t>عِنْدِي … وَ… مُنْذُ …</a:t>
@@ -4495,6 +4536,7 @@
                   <a:srgbClr val="1B3B6F"/>
                 </a:solidFill>
                 <a:latin typeface="Amiri" pitchFamily="2" charset="-78"/>
+                <a:ea typeface="Amiri" pitchFamily="2" charset="-78"/>
                 <a:cs typeface="Amiri" pitchFamily="2" charset="-78"/>
               </a:rPr>
               <a:t>مَرْحَبًا، كَيْفَ أُسَاعِدُكَ؟</a:t>
@@ -4598,6 +4640,7 @@
                   <a:srgbClr val="1B3B6F"/>
                 </a:solidFill>
                 <a:latin typeface="Amiri" pitchFamily="2" charset="-78"/>
+                <a:ea typeface="Amiri" pitchFamily="2" charset="-78"/>
                 <a:cs typeface="Amiri" pitchFamily="2" charset="-78"/>
               </a:rPr>
               <a:t>قَضَيْتُ … تَحْتَ الشَّمْسِ وَلَمْ …</a:t>
@@ -4674,6 +4717,7 @@
                   <a:srgbClr val="1B3B6F"/>
                 </a:solidFill>
                 <a:latin typeface="Amiri" pitchFamily="2" charset="-78"/>
+                <a:ea typeface="Amiri" pitchFamily="2" charset="-78"/>
                 <a:cs typeface="Amiri" pitchFamily="2" charset="-78"/>
               </a:rPr>
               <a:t>مَاذَا فَعَلْتَ أَمْسِ؟</a:t>
@@ -4777,6 +4821,7 @@
                   <a:srgbClr val="1B3B6F"/>
                 </a:solidFill>
                 <a:latin typeface="Amiri" pitchFamily="2" charset="-78"/>
+                <a:ea typeface="Amiri" pitchFamily="2" charset="-78"/>
                 <a:cs typeface="Amiri" pitchFamily="2" charset="-78"/>
               </a:rPr>
               <a:t>إِذَنْ، حَبَّةً كُلَّ … وَ…</a:t>
@@ -4853,6 +4898,7 @@
                   <a:srgbClr val="1B3B6F"/>
                 </a:solidFill>
                 <a:latin typeface="Amiri" pitchFamily="2" charset="-78"/>
+                <a:ea typeface="Amiri" pitchFamily="2" charset="-78"/>
                 <a:cs typeface="Amiri" pitchFamily="2" charset="-78"/>
               </a:rPr>
               <a:t>خُذْ حَبَّةً كُلَّ سِتِّ سَاعَاتٍ، وَاشْرَبْ مَاءً كَثِيرًا.</a:t>
@@ -4956,6 +5002,7 @@
                   <a:srgbClr val="1B3B6F"/>
                 </a:solidFill>
                 <a:latin typeface="Amiri" pitchFamily="2" charset="-78"/>
+                <a:ea typeface="Amiri" pitchFamily="2" charset="-78"/>
                 <a:cs typeface="Amiri" pitchFamily="2" charset="-78"/>
               </a:rPr>
               <a:t>سَأَبْقَى … وَسَأَزُورُ … بَدَلًا مِنْ …</a:t>
@@ -5032,6 +5079,7 @@
                   <a:srgbClr val="1B3B6F"/>
                 </a:solidFill>
                 <a:latin typeface="Amiri" pitchFamily="2" charset="-78"/>
+                <a:ea typeface="Amiri" pitchFamily="2" charset="-78"/>
                 <a:cs typeface="Amiri" pitchFamily="2" charset="-78"/>
               </a:rPr>
               <a:t>نَعَمْ. وَأَنْصَحُكَ بِأَلَّا تَخْرُجَ فِي الظُّهْرِ.</a:t>
@@ -5135,6 +5183,7 @@
                   <a:srgbClr val="1B3B6F"/>
                 </a:solidFill>
                 <a:latin typeface="Amiri" pitchFamily="2" charset="-78"/>
+                <a:ea typeface="Amiri" pitchFamily="2" charset="-78"/>
                 <a:cs typeface="Amiri" pitchFamily="2" charset="-78"/>
               </a:rPr>
               <a:t>أَنَا مِنْ … مَدِينَتُكُمْ أَجْمَلُ مِنْ …</a:t>
@@ -5211,6 +5260,7 @@
                   <a:srgbClr val="1B3B6F"/>
                 </a:solidFill>
                 <a:latin typeface="Amiri" pitchFamily="2" charset="-78"/>
+                <a:ea typeface="Amiri" pitchFamily="2" charset="-78"/>
                 <a:cs typeface="Amiri" pitchFamily="2" charset="-78"/>
               </a:rPr>
               <a:t>مِنْ أَيْنَ أَنْتَ؟ وَهَلْ تُعْجِبُكَ مَدِينَتُنَا؟</a:t>
@@ -5420,6 +5470,7 @@
                   <a:srgbClr val="D4AF37"/>
                 </a:solidFill>
                 <a:latin typeface="Amiri" pitchFamily="2" charset="-78"/>
+                <a:ea typeface="Amiri" pitchFamily="2" charset="-78"/>
                 <a:cs typeface="Amiri" pitchFamily="2" charset="-78"/>
               </a:rPr>
               <a:t>م</a:t>
@@ -5740,6 +5791,7 @@
                   <a:srgbClr val="8A6D1E"/>
                 </a:solidFill>
                 <a:latin typeface="Amiri" pitchFamily="2" charset="-78"/>
+                <a:ea typeface="Amiri" pitchFamily="2" charset="-78"/>
                 <a:cs typeface="Amiri" pitchFamily="2" charset="-78"/>
               </a:rPr>
               <a:t>هَلْ حَيَاتُنَا اليَوْمَ صِحِّيَّةٌ؟</a:t>
@@ -6020,6 +6072,7 @@
                   <a:srgbClr val="1B3B6F"/>
                 </a:solidFill>
                 <a:latin typeface="Amiri" pitchFamily="2" charset="-78"/>
+                <a:ea typeface="Amiri" pitchFamily="2" charset="-78"/>
                 <a:cs typeface="Amiri" pitchFamily="2" charset="-78"/>
               </a:rPr>
               <a:t>لَا أَظُنُّ ذٰلِكَ، لِأَنَّ … وَلِأَنَّ …</a:t>
@@ -6096,6 +6149,7 @@
                   <a:srgbClr val="1B3B6F"/>
                 </a:solidFill>
                 <a:latin typeface="Amiri" pitchFamily="2" charset="-78"/>
+                <a:ea typeface="Amiri" pitchFamily="2" charset="-78"/>
                 <a:cs typeface="Amiri" pitchFamily="2" charset="-78"/>
               </a:rPr>
               <a:t>هَلْ يَعِيشُ الشَّبَابُ اليَوْمَ حَيَاةً صِحِّيَّةً؟</a:t>
@@ -6199,6 +6253,7 @@
                   <a:srgbClr val="1B3B6F"/>
                 </a:solidFill>
                 <a:latin typeface="Amiri" pitchFamily="2" charset="-78"/>
+                <a:ea typeface="Amiri" pitchFamily="2" charset="-78"/>
                 <a:cs typeface="Amiri" pitchFamily="2" charset="-78"/>
               </a:rPr>
               <a:t>كَانَ النَّاسُ … أَمَّا اليَوْمَ فَنَرْكَبُ …</a:t>
@@ -6275,6 +6330,7 @@
                   <a:srgbClr val="1B3B6F"/>
                 </a:solidFill>
                 <a:latin typeface="Amiri" pitchFamily="2" charset="-78"/>
+                <a:ea typeface="Amiri" pitchFamily="2" charset="-78"/>
                 <a:cs typeface="Amiri" pitchFamily="2" charset="-78"/>
               </a:rPr>
               <a:t>وَكَيْفَ كَانَتِ الحَيَاةُ فِي المَاضِي؟</a:t>
@@ -6378,6 +6434,7 @@
                   <a:srgbClr val="1B3B6F"/>
                 </a:solidFill>
                 <a:latin typeface="Amiri" pitchFamily="2" charset="-78"/>
+                <a:ea typeface="Amiri" pitchFamily="2" charset="-78"/>
                 <a:cs typeface="Amiri" pitchFamily="2" charset="-78"/>
               </a:rPr>
               <a:t>كُنْتُ … فَقَرَّرْتُ أَنْ …</a:t>
@@ -6454,6 +6511,7 @@
                   <a:srgbClr val="1B3B6F"/>
                 </a:solidFill>
                 <a:latin typeface="Amiri" pitchFamily="2" charset="-78"/>
+                <a:ea typeface="Amiri" pitchFamily="2" charset="-78"/>
                 <a:cs typeface="Amiri" pitchFamily="2" charset="-78"/>
               </a:rPr>
               <a:t>أَعْطِنَا مِثَالًا مِنْ حَيَاتِكَ.</a:t>
@@ -6557,6 +6615,7 @@
                   <a:srgbClr val="1B3B6F"/>
                 </a:solidFill>
                 <a:latin typeface="Amiri" pitchFamily="2" charset="-78"/>
+                <a:ea typeface="Amiri" pitchFamily="2" charset="-78"/>
                 <a:cs typeface="Amiri" pitchFamily="2" charset="-78"/>
               </a:rPr>
               <a:t>صَحِيحٌ أَنَّ … غَيْرَ أَنَّ …</a:t>
@@ -6633,6 +6692,7 @@
                   <a:srgbClr val="1B3B6F"/>
                 </a:solidFill>
                 <a:latin typeface="Amiri" pitchFamily="2" charset="-78"/>
+                <a:ea typeface="Amiri" pitchFamily="2" charset="-78"/>
                 <a:cs typeface="Amiri" pitchFamily="2" charset="-78"/>
               </a:rPr>
               <a:t>لٰكِنَّ التِّكْنُولُوجْيَا تُسَاعِدُنَا أَيْضًا، أَلَيْسَ كَذٰلِكَ؟</a:t>
@@ -6736,6 +6796,7 @@
                   <a:srgbClr val="1B3B6F"/>
                 </a:solidFill>
                 <a:latin typeface="Amiri" pitchFamily="2" charset="-78"/>
+                <a:ea typeface="Amiri" pitchFamily="2" charset="-78"/>
                 <a:cs typeface="Amiri" pitchFamily="2" charset="-78"/>
               </a:rPr>
               <a:t>لَوْ كَانَ لِي ذٰلِكَ، لَبَنَيْتُ …</a:t>
@@ -6815,6 +6876,7 @@
                   <a:srgbClr val="1B3B6F"/>
                 </a:solidFill>
                 <a:latin typeface="Amiri" pitchFamily="2" charset="-78"/>
+                <a:ea typeface="Amiri" pitchFamily="2" charset="-78"/>
                 <a:cs typeface="Amiri" pitchFamily="2" charset="-78"/>
               </a:rPr>
               <a:t>لَوْ كَانَ لَكَ أَنْ تُغَيِّرَ شَيْئًا وَاحِدًا فِي مَدِينَتِكَ، فَمَاذَا يَكُونُ؟</a:t>
@@ -7024,6 +7086,7 @@
                   <a:srgbClr val="D4AF37"/>
                 </a:solidFill>
                 <a:latin typeface="Amiri" pitchFamily="2" charset="-78"/>
+                <a:ea typeface="Amiri" pitchFamily="2" charset="-78"/>
                 <a:cs typeface="Amiri" pitchFamily="2" charset="-78"/>
               </a:rPr>
               <a:t>م</a:t>
@@ -7344,6 +7407,7 @@
                   <a:srgbClr val="8A6D1E"/>
                 </a:solidFill>
                 <a:latin typeface="Amiri" pitchFamily="2" charset="-78"/>
+                <a:ea typeface="Amiri" pitchFamily="2" charset="-78"/>
                 <a:cs typeface="Amiri" pitchFamily="2" charset="-78"/>
               </a:rPr>
               <a:t>وَرَقَةُ المُلَاحِظِ</a:t>
@@ -8814,6 +8878,7 @@
                   <a:srgbClr val="D4AF37"/>
                 </a:solidFill>
                 <a:latin typeface="Amiri" pitchFamily="2" charset="-78"/>
+                <a:ea typeface="Amiri" pitchFamily="2" charset="-78"/>
                 <a:cs typeface="Amiri" pitchFamily="2" charset="-78"/>
               </a:rPr>
               <a:t>م</a:t>
@@ -9134,6 +9199,7 @@
                   <a:srgbClr val="8A6D1E"/>
                 </a:solidFill>
                 <a:latin typeface="Amiri" pitchFamily="2" charset="-78"/>
+                <a:ea typeface="Amiri" pitchFamily="2" charset="-78"/>
                 <a:cs typeface="Amiri" pitchFamily="2" charset="-78"/>
               </a:rPr>
               <a:t>نَمُوذَجُ الإِجَابَةِ</a:t>
@@ -9376,6 +9442,7 @@
                   <a:srgbClr val="1B3B6F"/>
                 </a:solidFill>
                 <a:latin typeface="Amiri" pitchFamily="2" charset="-78"/>
+                <a:ea typeface="Amiri" pitchFamily="2" charset="-78"/>
                 <a:cs typeface="Amiri" pitchFamily="2" charset="-78"/>
               </a:rPr>
               <a:t>أَسْتَيْقِظُ عَادَةً فِي السَّاعَةِ السَّادِسَةِ وَالنِّصْفِ.</a:t>
@@ -9452,6 +9519,7 @@
                   <a:srgbClr val="1B3B6F"/>
                 </a:solidFill>
                 <a:latin typeface="Amiri" pitchFamily="2" charset="-78"/>
+                <a:ea typeface="Amiri" pitchFamily="2" charset="-78"/>
                 <a:cs typeface="Amiri" pitchFamily="2" charset="-78"/>
               </a:rPr>
               <a:t>أَهْلًا وَسَهْلًا! فِي أَيِّ سَاعَةٍ تَسْتَيْقِظُ عَادَةً؟</a:t>
@@ -9555,6 +9623,7 @@
                   <a:srgbClr val="1B3B6F"/>
                 </a:solidFill>
                 <a:latin typeface="Amiri" pitchFamily="2" charset="-78"/>
+                <a:ea typeface="Amiri" pitchFamily="2" charset="-78"/>
                 <a:cs typeface="Amiri" pitchFamily="2" charset="-78"/>
               </a:rPr>
               <a:t>آكُلُ الخُبْزَ مَعَ الجُبْنِ، وَأَشْرَبُ الشَّايَ بِالحَلِيبِ.</a:t>
@@ -9631,6 +9700,7 @@
                   <a:srgbClr val="1B3B6F"/>
                 </a:solidFill>
                 <a:latin typeface="Amiri" pitchFamily="2" charset="-78"/>
+                <a:ea typeface="Amiri" pitchFamily="2" charset="-78"/>
                 <a:cs typeface="Amiri" pitchFamily="2" charset="-78"/>
               </a:rPr>
               <a:t>مَاذَا تَأْكُلُ فِي الفُطُورِ؟</a:t>
@@ -9734,6 +9804,7 @@
                   <a:srgbClr val="1B3B6F"/>
                 </a:solidFill>
                 <a:latin typeface="Amiri" pitchFamily="2" charset="-78"/>
+                <a:ea typeface="Amiri" pitchFamily="2" charset="-78"/>
                 <a:cs typeface="Amiri" pitchFamily="2" charset="-78"/>
               </a:rPr>
               <a:t>لَا آكُلُ السَّمَكَ، لِأَنِّي لَا أُحِبُّ طَعْمَهُ.</a:t>
@@ -9810,6 +9881,7 @@
                   <a:srgbClr val="1B3B6F"/>
                 </a:solidFill>
                 <a:latin typeface="Amiri" pitchFamily="2" charset="-78"/>
+                <a:ea typeface="Amiri" pitchFamily="2" charset="-78"/>
                 <a:cs typeface="Amiri" pitchFamily="2" charset="-78"/>
               </a:rPr>
               <a:t>هَلْ هُنَاكَ طَعَامٌ لَا تَأْكُلُهُ؟</a:t>
@@ -9913,6 +9985,7 @@
                   <a:srgbClr val="1B3B6F"/>
                 </a:solidFill>
                 <a:latin typeface="Amiri" pitchFamily="2" charset="-78"/>
+                <a:ea typeface="Amiri" pitchFamily="2" charset="-78"/>
                 <a:cs typeface="Amiri" pitchFamily="2" charset="-78"/>
               </a:rPr>
               <a:t>سَافَرْتُ بِالطَّائِرَةِ، وَاسْتَغْرَقَتِ الرِّحْلَةُ خَمْسَ سَاعَاتٍ، لٰكِنَّهَا كَانَتْ مُرِيحَةً.</a:t>
@@ -9989,6 +10062,7 @@
                   <a:srgbClr val="1B3B6F"/>
                 </a:solidFill>
                 <a:latin typeface="Amiri" pitchFamily="2" charset="-78"/>
+                <a:ea typeface="Amiri" pitchFamily="2" charset="-78"/>
                 <a:cs typeface="Amiri" pitchFamily="2" charset="-78"/>
               </a:rPr>
               <a:t>كَيْفَ كَانَتْ رِحْلَتُكَ إِلَى هُنَا؟</a:t>
@@ -10092,6 +10166,7 @@
                   <a:srgbClr val="1B3B6F"/>
                 </a:solidFill>
                 <a:latin typeface="Amiri" pitchFamily="2" charset="-78"/>
+                <a:ea typeface="Amiri" pitchFamily="2" charset="-78"/>
                 <a:cs typeface="Amiri" pitchFamily="2" charset="-78"/>
               </a:rPr>
               <a:t>أُرِيدُ أَنْ أَزُورَ وَسَطَ المَدِينَةِ وَالسُّوقَ القَدِيمَ.</a:t>
@@ -10168,6 +10243,7 @@
                   <a:srgbClr val="1B3B6F"/>
                 </a:solidFill>
                 <a:latin typeface="Amiri" pitchFamily="2" charset="-78"/>
+                <a:ea typeface="Amiri" pitchFamily="2" charset="-78"/>
                 <a:cs typeface="Amiri" pitchFamily="2" charset="-78"/>
               </a:rPr>
               <a:t>مَاذَا تُرِيدُ أَنْ تَفْعَلَ غَدًا؟</a:t>
@@ -10377,6 +10453,7 @@
                   <a:srgbClr val="D4AF37"/>
                 </a:solidFill>
                 <a:latin typeface="Amiri" pitchFamily="2" charset="-78"/>
+                <a:ea typeface="Amiri" pitchFamily="2" charset="-78"/>
                 <a:cs typeface="Amiri" pitchFamily="2" charset="-78"/>
               </a:rPr>
               <a:t>م</a:t>
@@ -10697,6 +10774,7 @@
                   <a:srgbClr val="8A6D1E"/>
                 </a:solidFill>
                 <a:latin typeface="Amiri" pitchFamily="2" charset="-78"/>
+                <a:ea typeface="Amiri" pitchFamily="2" charset="-78"/>
                 <a:cs typeface="Amiri" pitchFamily="2" charset="-78"/>
               </a:rPr>
               <a:t>نَمُوذَجُ الإِجَابَةِ</a:t>
@@ -10939,6 +11017,7 @@
                   <a:srgbClr val="1B3B6F"/>
                 </a:solidFill>
                 <a:latin typeface="Amiri" pitchFamily="2" charset="-78"/>
+                <a:ea typeface="Amiri" pitchFamily="2" charset="-78"/>
                 <a:cs typeface="Amiri" pitchFamily="2" charset="-78"/>
               </a:rPr>
               <a:t>طَاوِلَةٌ لِشَخْصَيْنِ، مِنْ فَضْلِكَ، بِجَانِبِ النَّافِذَةِ.</a:t>
@@ -11015,6 +11094,7 @@
                   <a:srgbClr val="1B3B6F"/>
                 </a:solidFill>
                 <a:latin typeface="Amiri" pitchFamily="2" charset="-78"/>
+                <a:ea typeface="Amiri" pitchFamily="2" charset="-78"/>
                 <a:cs typeface="Amiri" pitchFamily="2" charset="-78"/>
               </a:rPr>
               <a:t>مَسَاءُ الخَيْرِ، طَاوِلَةٌ لِكَمْ شَخْصًا؟</a:t>
@@ -11118,6 +11198,7 @@
                   <a:srgbClr val="1B3B6F"/>
                 </a:solidFill>
                 <a:latin typeface="Amiri" pitchFamily="2" charset="-78"/>
+                <a:ea typeface="Amiri" pitchFamily="2" charset="-78"/>
                 <a:cs typeface="Amiri" pitchFamily="2" charset="-78"/>
               </a:rPr>
               <a:t>أُرِيدُ دَجَاجًا مَشْوِيًّا مَعَ الأُرْزِ، وَعَصِيرَ بُرْتُقَالٍ.</a:t>
@@ -11194,6 +11275,7 @@
                   <a:srgbClr val="1B3B6F"/>
                 </a:solidFill>
                 <a:latin typeface="Amiri" pitchFamily="2" charset="-78"/>
+                <a:ea typeface="Amiri" pitchFamily="2" charset="-78"/>
                 <a:cs typeface="Amiri" pitchFamily="2" charset="-78"/>
               </a:rPr>
               <a:t>مَاذَا تَطْلُبُ؟</a:t>
@@ -11297,6 +11379,7 @@
                   <a:srgbClr val="1B3B6F"/>
                 </a:solidFill>
                 <a:latin typeface="Amiri" pitchFamily="2" charset="-78"/>
+                <a:ea typeface="Amiri" pitchFamily="2" charset="-78"/>
                 <a:cs typeface="Amiri" pitchFamily="2" charset="-78"/>
               </a:rPr>
               <a:t>صَدِيقِي يُؤْلِمُهُ بَطْنُهُ، فَهَلْ عِنْدَكُمْ شُورْبَةٌ خَفِيفَةٌ؟</a:t>
@@ -11373,6 +11456,7 @@
                   <a:srgbClr val="1B3B6F"/>
                 </a:solidFill>
                 <a:latin typeface="Amiri" pitchFamily="2" charset="-78"/>
+                <a:ea typeface="Amiri" pitchFamily="2" charset="-78"/>
                 <a:cs typeface="Amiri" pitchFamily="2" charset="-78"/>
               </a:rPr>
               <a:t>وَصَدِيقُكَ؟</a:t>
@@ -11476,6 +11560,7 @@
                   <a:srgbClr val="1B3B6F"/>
                 </a:solidFill>
                 <a:latin typeface="Amiri" pitchFamily="2" charset="-78"/>
+                <a:ea typeface="Amiri" pitchFamily="2" charset="-78"/>
                 <a:cs typeface="Amiri" pitchFamily="2" charset="-78"/>
               </a:rPr>
               <a:t>لَا، شُكْرًا، لِأَنِّي أُحَاوِلُ أَنْ آكُلَ سُكَّرًا أَقَلَّ.</a:t>
@@ -11552,6 +11637,7 @@
                   <a:srgbClr val="1B3B6F"/>
                 </a:solidFill>
                 <a:latin typeface="Amiri" pitchFamily="2" charset="-78"/>
+                <a:ea typeface="Amiri" pitchFamily="2" charset="-78"/>
                 <a:cs typeface="Amiri" pitchFamily="2" charset="-78"/>
               </a:rPr>
               <a:t>عِنْدَنَا شُورْبَةُ خُضَارٍ. هَلْ تُرِيدُ حَلْوَى بَعْدَ ذٰلِكَ؟</a:t>
@@ -11655,6 +11741,7 @@
                   <a:srgbClr val="1B3B6F"/>
                 </a:solidFill>
                 <a:latin typeface="Amiri" pitchFamily="2" charset="-78"/>
+                <a:ea typeface="Amiri" pitchFamily="2" charset="-78"/>
                 <a:cs typeface="Amiri" pitchFamily="2" charset="-78"/>
               </a:rPr>
               <a:t>نَعَمْ، فِي الشَّهْرِ المَاضِي، وَكَانَ الأَكْلُ لَذِيذًا جِدًّا.</a:t>
@@ -11731,6 +11818,7 @@
                   <a:srgbClr val="1B3B6F"/>
                 </a:solidFill>
                 <a:latin typeface="Amiri" pitchFamily="2" charset="-78"/>
+                <a:ea typeface="Amiri" pitchFamily="2" charset="-78"/>
                 <a:cs typeface="Amiri" pitchFamily="2" charset="-78"/>
               </a:rPr>
               <a:t>هَلْ أَكَلْتُمْ عِنْدَنَا مِنْ قَبْلُ؟</a:t>
@@ -11940,6 +12028,7 @@
                   <a:srgbClr val="D4AF37"/>
                 </a:solidFill>
                 <a:latin typeface="Amiri" pitchFamily="2" charset="-78"/>
+                <a:ea typeface="Amiri" pitchFamily="2" charset="-78"/>
                 <a:cs typeface="Amiri" pitchFamily="2" charset="-78"/>
               </a:rPr>
               <a:t>م</a:t>
@@ -12260,6 +12349,7 @@
                   <a:srgbClr val="8A6D1E"/>
                 </a:solidFill>
                 <a:latin typeface="Amiri" pitchFamily="2" charset="-78"/>
+                <a:ea typeface="Amiri" pitchFamily="2" charset="-78"/>
                 <a:cs typeface="Amiri" pitchFamily="2" charset="-78"/>
               </a:rPr>
               <a:t>نَمُوذَجُ الإِجَابَةِ</a:t>
@@ -12502,6 +12592,7 @@
                   <a:srgbClr val="1B3B6F"/>
                 </a:solidFill>
                 <a:latin typeface="Amiri" pitchFamily="2" charset="-78"/>
+                <a:ea typeface="Amiri" pitchFamily="2" charset="-78"/>
                 <a:cs typeface="Amiri" pitchFamily="2" charset="-78"/>
               </a:rPr>
               <a:t>عِنْدِي صُدَاعٌ وَحَرَارَةٌ مُنْذُ أَمْسِ.</a:t>
@@ -12578,6 +12669,7 @@
                   <a:srgbClr val="1B3B6F"/>
                 </a:solidFill>
                 <a:latin typeface="Amiri" pitchFamily="2" charset="-78"/>
+                <a:ea typeface="Amiri" pitchFamily="2" charset="-78"/>
                 <a:cs typeface="Amiri" pitchFamily="2" charset="-78"/>
               </a:rPr>
               <a:t>مَرْحَبًا، كَيْفَ أُسَاعِدُكَ؟</a:t>
@@ -12681,6 +12773,7 @@
                   <a:srgbClr val="1B3B6F"/>
                 </a:solidFill>
                 <a:latin typeface="Amiri" pitchFamily="2" charset="-78"/>
+                <a:ea typeface="Amiri" pitchFamily="2" charset="-78"/>
                 <a:cs typeface="Amiri" pitchFamily="2" charset="-78"/>
               </a:rPr>
               <a:t>قَضَيْتُ اليَوْمَ كُلَّهُ عَلَى الشَّاطِئِ تَحْتَ الشَّمْسِ، وَلَمْ أَشْرَبْ مَاءً كَافِيًا.</a:t>
@@ -12757,6 +12850,7 @@
                   <a:srgbClr val="1B3B6F"/>
                 </a:solidFill>
                 <a:latin typeface="Amiri" pitchFamily="2" charset="-78"/>
+                <a:ea typeface="Amiri" pitchFamily="2" charset="-78"/>
                 <a:cs typeface="Amiri" pitchFamily="2" charset="-78"/>
               </a:rPr>
               <a:t>مَاذَا فَعَلْتَ أَمْسِ؟</a:t>
@@ -12860,6 +12954,7 @@
                   <a:srgbClr val="1B3B6F"/>
                 </a:solidFill>
                 <a:latin typeface="Amiri" pitchFamily="2" charset="-78"/>
+                <a:ea typeface="Amiri" pitchFamily="2" charset="-78"/>
                 <a:cs typeface="Amiri" pitchFamily="2" charset="-78"/>
               </a:rPr>
               <a:t>إِذَنْ، حَبَّةً كُلَّ سِتِّ سَاعَاتٍ، وَأَشْرَبُ مَاءً كَثِيرًا. هَلْ آخُذُهَا بَعْدَ الأَكْلِ؟</a:t>
@@ -12936,6 +13031,7 @@
                   <a:srgbClr val="1B3B6F"/>
                 </a:solidFill>
                 <a:latin typeface="Amiri" pitchFamily="2" charset="-78"/>
+                <a:ea typeface="Amiri" pitchFamily="2" charset="-78"/>
                 <a:cs typeface="Amiri" pitchFamily="2" charset="-78"/>
               </a:rPr>
               <a:t>خُذْ حَبَّةً كُلَّ سِتِّ سَاعَاتٍ، وَاشْرَبْ مَاءً كَثِيرًا.</a:t>
@@ -13039,6 +13135,7 @@
                   <a:srgbClr val="1B3B6F"/>
                 </a:solidFill>
                 <a:latin typeface="Amiri" pitchFamily="2" charset="-78"/>
+                <a:ea typeface="Amiri" pitchFamily="2" charset="-78"/>
                 <a:cs typeface="Amiri" pitchFamily="2" charset="-78"/>
               </a:rPr>
               <a:t>حَسَنًا، سَأَبْقَى فِي الفُنْدُقِ فِي الظُّهْرِ، وَسَأَزُورُ المُتْحَفَ بَدَلًا مِنَ الشَّاطِئِ.</a:t>
@@ -13115,6 +13212,7 @@
                   <a:srgbClr val="1B3B6F"/>
                 </a:solidFill>
                 <a:latin typeface="Amiri" pitchFamily="2" charset="-78"/>
+                <a:ea typeface="Amiri" pitchFamily="2" charset="-78"/>
                 <a:cs typeface="Amiri" pitchFamily="2" charset="-78"/>
               </a:rPr>
               <a:t>نَعَمْ. وَأَنْصَحُكَ بِأَلَّا تَخْرُجَ فِي الظُّهْرِ.</a:t>
@@ -13218,6 +13316,7 @@
                   <a:srgbClr val="1B3B6F"/>
                 </a:solidFill>
                 <a:latin typeface="Amiri" pitchFamily="2" charset="-78"/>
+                <a:ea typeface="Amiri" pitchFamily="2" charset="-78"/>
                 <a:cs typeface="Amiri" pitchFamily="2" charset="-78"/>
               </a:rPr>
               <a:t>أَنَا مِنْ مَانْشِسْتَرَ، وَمَدِينَتُكُمْ أَجْمَلُ وَأَدْفَأُ مِنْ مَدِينَتِي بِكَثِيرٍ!</a:t>
@@ -13294,6 +13393,7 @@
                   <a:srgbClr val="1B3B6F"/>
                 </a:solidFill>
                 <a:latin typeface="Amiri" pitchFamily="2" charset="-78"/>
+                <a:ea typeface="Amiri" pitchFamily="2" charset="-78"/>
                 <a:cs typeface="Amiri" pitchFamily="2" charset="-78"/>
               </a:rPr>
               <a:t>مِنْ أَيْنَ أَنْتَ؟ وَهَلْ تُعْجِبُكَ مَدِينَتُنَا؟</a:t>
@@ -13503,6 +13603,7 @@
                   <a:srgbClr val="D4AF37"/>
                 </a:solidFill>
                 <a:latin typeface="Amiri" pitchFamily="2" charset="-78"/>
+                <a:ea typeface="Amiri" pitchFamily="2" charset="-78"/>
                 <a:cs typeface="Amiri" pitchFamily="2" charset="-78"/>
               </a:rPr>
               <a:t>م</a:t>
@@ -13823,6 +13924,7 @@
                   <a:srgbClr val="8A6D1E"/>
                 </a:solidFill>
                 <a:latin typeface="Amiri" pitchFamily="2" charset="-78"/>
+                <a:ea typeface="Amiri" pitchFamily="2" charset="-78"/>
                 <a:cs typeface="Amiri" pitchFamily="2" charset="-78"/>
               </a:rPr>
               <a:t>نَمُوذَجُ الإِجَابَةِ</a:t>
@@ -14065,6 +14167,7 @@
                   <a:srgbClr val="1B3B6F"/>
                 </a:solidFill>
                 <a:latin typeface="Amiri" pitchFamily="2" charset="-78"/>
+                <a:ea typeface="Amiri" pitchFamily="2" charset="-78"/>
                 <a:cs typeface="Amiri" pitchFamily="2" charset="-78"/>
               </a:rPr>
               <a:t>لَا أَظُنُّ ذٰلِكَ، لِأَنَّهُمْ يَنَامُونَ قَلِيلًا، وَلِأَنَّهُمْ يَأْكُلُونَ الوَجَبَاتِ السَّرِيعَةَ كَثِيرًا.</a:t>
@@ -14141,6 +14244,7 @@
                   <a:srgbClr val="1B3B6F"/>
                 </a:solidFill>
                 <a:latin typeface="Amiri" pitchFamily="2" charset="-78"/>
+                <a:ea typeface="Amiri" pitchFamily="2" charset="-78"/>
                 <a:cs typeface="Amiri" pitchFamily="2" charset="-78"/>
               </a:rPr>
               <a:t>هَلْ يَعِيشُ الشَّبَابُ اليَوْمَ حَيَاةً صِحِّيَّةً؟</a:t>
@@ -14244,6 +14348,7 @@
                   <a:srgbClr val="1B3B6F"/>
                 </a:solidFill>
                 <a:latin typeface="Amiri" pitchFamily="2" charset="-78"/>
+                <a:ea typeface="Amiri" pitchFamily="2" charset="-78"/>
                 <a:cs typeface="Amiri" pitchFamily="2" charset="-78"/>
               </a:rPr>
               <a:t>كَانَ النَّاسُ يَمْشُونَ أَكْثَرَ وَيَطْبُخُونَ فِي البَيْتِ، أَمَّا اليَوْمَ فَنَرْكَبُ السَّيَّارَاتِ وَنَطْلُبُ الأَكْلَ بِالهَاتِفِ.</a:t>
@@ -14320,6 +14425,7 @@
                   <a:srgbClr val="1B3B6F"/>
                 </a:solidFill>
                 <a:latin typeface="Amiri" pitchFamily="2" charset="-78"/>
+                <a:ea typeface="Amiri" pitchFamily="2" charset="-78"/>
                 <a:cs typeface="Amiri" pitchFamily="2" charset="-78"/>
               </a:rPr>
               <a:t>وَكَيْفَ كَانَتِ الحَيَاةُ فِي المَاضِي؟</a:t>
@@ -14423,6 +14529,7 @@
                   <a:srgbClr val="1B3B6F"/>
                 </a:solidFill>
                 <a:latin typeface="Amiri" pitchFamily="2" charset="-78"/>
+                <a:ea typeface="Amiri" pitchFamily="2" charset="-78"/>
                 <a:cs typeface="Amiri" pitchFamily="2" charset="-78"/>
               </a:rPr>
               <a:t>كُنْتُ أَذْهَبُ إِلَى المَدْرَسَةِ بِالسَّيَّارَةِ، فَقَرَّرْتُ أَنْ أَمْشِيَ، وَالآنَ أَشْعُرُ بِنَشَاطٍ أَكْبَرَ.</a:t>
@@ -14499,6 +14606,7 @@
                   <a:srgbClr val="1B3B6F"/>
                 </a:solidFill>
                 <a:latin typeface="Amiri" pitchFamily="2" charset="-78"/>
+                <a:ea typeface="Amiri" pitchFamily="2" charset="-78"/>
                 <a:cs typeface="Amiri" pitchFamily="2" charset="-78"/>
               </a:rPr>
               <a:t>أَعْطِنَا مِثَالًا مِنْ حَيَاتِكَ.</a:t>
@@ -14602,6 +14710,7 @@
                   <a:srgbClr val="1B3B6F"/>
                 </a:solidFill>
                 <a:latin typeface="Amiri" pitchFamily="2" charset="-78"/>
+                <a:ea typeface="Amiri" pitchFamily="2" charset="-78"/>
                 <a:cs typeface="Amiri" pitchFamily="2" charset="-78"/>
               </a:rPr>
               <a:t>صَحِيحٌ أَنَّ التَّطْبِيقَاتِ تُذَكِّرُنَا بِشُرْبِ المَاءِ، غَيْرَ أَنَّهَا لَا تَمْشِي عَنَّا!</a:t>
@@ -14678,6 +14787,7 @@
                   <a:srgbClr val="1B3B6F"/>
                 </a:solidFill>
                 <a:latin typeface="Amiri" pitchFamily="2" charset="-78"/>
+                <a:ea typeface="Amiri" pitchFamily="2" charset="-78"/>
                 <a:cs typeface="Amiri" pitchFamily="2" charset="-78"/>
               </a:rPr>
               <a:t>لٰكِنَّ التِّكْنُولُوجْيَا تُسَاعِدُنَا أَيْضًا، أَلَيْسَ كَذٰلِكَ؟</a:t>
@@ -14781,6 +14891,7 @@
                   <a:srgbClr val="1B3B6F"/>
                 </a:solidFill>
                 <a:latin typeface="Amiri" pitchFamily="2" charset="-78"/>
+                <a:ea typeface="Amiri" pitchFamily="2" charset="-78"/>
                 <a:cs typeface="Amiri" pitchFamily="2" charset="-78"/>
               </a:rPr>
               <a:t>لَوْ كَانَ لِي ذٰلِكَ، لَبَنَيْتُ مَلَاعِبَ مَجَّانِيَّةً قُرْبَ كُلِّ مَدْرَسَةٍ، وَلَمَنَعْتُ السَّيَّارَاتِ أَمَامَهَا صَبَاحًا.</a:t>
@@ -14860,6 +14971,7 @@
                   <a:srgbClr val="1B3B6F"/>
                 </a:solidFill>
                 <a:latin typeface="Amiri" pitchFamily="2" charset="-78"/>
+                <a:ea typeface="Amiri" pitchFamily="2" charset="-78"/>
                 <a:cs typeface="Amiri" pitchFamily="2" charset="-78"/>
               </a:rPr>
               <a:t>لَوْ كَانَ لَكَ أَنْ تُغَيِّرَ شَيْئًا وَاحِدًا فِي مَدِينَتِكَ، فَمَاذَا يَكُونُ؟</a:t>
@@ -15069,6 +15181,7 @@
                   <a:srgbClr val="D4AF37"/>
                 </a:solidFill>
                 <a:latin typeface="Amiri" pitchFamily="2" charset="-78"/>
+                <a:ea typeface="Amiri" pitchFamily="2" charset="-78"/>
                 <a:cs typeface="Amiri" pitchFamily="2" charset="-78"/>
               </a:rPr>
               <a:t>م</a:t>
@@ -15389,6 +15502,7 @@
                   <a:srgbClr val="8A6D1E"/>
                 </a:solidFill>
                 <a:latin typeface="Amiri" pitchFamily="2" charset="-78"/>
+                <a:ea typeface="Amiri" pitchFamily="2" charset="-78"/>
                 <a:cs typeface="Amiri" pitchFamily="2" charset="-78"/>
               </a:rPr>
               <a:t>حَيَاتِي اليَوْمِيَّةُ</a:t>
@@ -15669,6 +15783,7 @@
                   <a:srgbClr val="1B3B6F"/>
                 </a:solidFill>
                 <a:latin typeface="Amiri" pitchFamily="2" charset="-78"/>
+                <a:ea typeface="Amiri" pitchFamily="2" charset="-78"/>
                 <a:cs typeface="Amiri" pitchFamily="2" charset="-78"/>
               </a:rPr>
               <a:t>أَسْتَيْقِظُ فِي … ثُمَّ …</a:t>
@@ -15745,6 +15860,7 @@
                   <a:srgbClr val="1B3B6F"/>
                 </a:solidFill>
                 <a:latin typeface="Amiri" pitchFamily="2" charset="-78"/>
+                <a:ea typeface="Amiri" pitchFamily="2" charset="-78"/>
                 <a:cs typeface="Amiri" pitchFamily="2" charset="-78"/>
               </a:rPr>
               <a:t>صِفْ يَوْمًا عَادِيًّا فِي حَيَاتِكَ.</a:t>
@@ -15913,6 +16029,7 @@
                   <a:srgbClr val="1B3B6F"/>
                 </a:solidFill>
                 <a:latin typeface="Amiri" pitchFamily="2" charset="-78"/>
+                <a:ea typeface="Amiri" pitchFamily="2" charset="-78"/>
                 <a:cs typeface="Amiri" pitchFamily="2" charset="-78"/>
               </a:rPr>
               <a:t>طَعَامِي المُفَضَّلُ …</a:t>
@@ -15989,6 +16106,7 @@
                   <a:srgbClr val="1B3B6F"/>
                 </a:solidFill>
                 <a:latin typeface="Amiri" pitchFamily="2" charset="-78"/>
+                <a:ea typeface="Amiri" pitchFamily="2" charset="-78"/>
                 <a:cs typeface="Amiri" pitchFamily="2" charset="-78"/>
               </a:rPr>
               <a:t>مَا طَعَامُكَ المُفَضَّلُ؟</a:t>
@@ -16157,6 +16275,7 @@
                   <a:srgbClr val="1B3B6F"/>
                 </a:solidFill>
                 <a:latin typeface="Amiri" pitchFamily="2" charset="-78"/>
+                <a:ea typeface="Amiri" pitchFamily="2" charset="-78"/>
                 <a:cs typeface="Amiri" pitchFamily="2" charset="-78"/>
               </a:rPr>
               <a:t>أُمَارِسُ الرِّيَاضَةَ … مَرَّاتٍ</a:t>
@@ -16233,6 +16352,7 @@
                   <a:srgbClr val="1B3B6F"/>
                 </a:solidFill>
                 <a:latin typeface="Amiri" pitchFamily="2" charset="-78"/>
+                <a:ea typeface="Amiri" pitchFamily="2" charset="-78"/>
                 <a:cs typeface="Amiri" pitchFamily="2" charset="-78"/>
               </a:rPr>
               <a:t>كَمْ مَرَّةً تُمَارِسُ الرِّيَاضَةَ؟</a:t>
@@ -16401,6 +16521,7 @@
                   <a:srgbClr val="1B3B6F"/>
                 </a:solidFill>
                 <a:latin typeface="Amiri" pitchFamily="2" charset="-78"/>
+                <a:ea typeface="Amiri" pitchFamily="2" charset="-78"/>
                 <a:cs typeface="Amiri" pitchFamily="2" charset="-78"/>
               </a:rPr>
               <a:t>أَذْهَبُ بِالحَافِلَةِ / أَمْشِي …</a:t>
@@ -16477,6 +16598,7 @@
                   <a:srgbClr val="1B3B6F"/>
                 </a:solidFill>
                 <a:latin typeface="Amiri" pitchFamily="2" charset="-78"/>
+                <a:ea typeface="Amiri" pitchFamily="2" charset="-78"/>
                 <a:cs typeface="Amiri" pitchFamily="2" charset="-78"/>
               </a:rPr>
               <a:t>كَيْفَ تَذْهَبُ إِلَى المَدْرَسَةِ؟</a:t>
@@ -16645,6 +16767,7 @@
                   <a:srgbClr val="1B3B6F"/>
                 </a:solidFill>
                 <a:latin typeface="Amiri" pitchFamily="2" charset="-78"/>
+                <a:ea typeface="Amiri" pitchFamily="2" charset="-78"/>
                 <a:cs typeface="Amiri" pitchFamily="2" charset="-78"/>
               </a:rPr>
               <a:t>قَضَيْتُ عُطْلَتِي فِي …</a:t>
@@ -16721,6 +16844,7 @@
                   <a:srgbClr val="1B3B6F"/>
                 </a:solidFill>
                 <a:latin typeface="Amiri" pitchFamily="2" charset="-78"/>
+                <a:ea typeface="Amiri" pitchFamily="2" charset="-78"/>
                 <a:cs typeface="Amiri" pitchFamily="2" charset="-78"/>
               </a:rPr>
               <a:t>أَيْنَ قَضَيْتَ عُطْلَتَكَ الأَخِيرَةَ؟</a:t>
@@ -16875,6 +16999,7 @@
                   <a:srgbClr val="1B3B6F"/>
                 </a:solidFill>
                 <a:latin typeface="Amiri" pitchFamily="2" charset="-78"/>
+                <a:ea typeface="Amiri" pitchFamily="2" charset="-78"/>
                 <a:cs typeface="Amiri" pitchFamily="2" charset="-78"/>
               </a:rPr>
               <a:t>عَفْوًا، هَلْ يُمْكِنُ أَنْ تُعِيدَ السُّؤَالَ؟</a:t>
@@ -17008,6 +17133,7 @@
                   <a:srgbClr val="D4AF37"/>
                 </a:solidFill>
                 <a:latin typeface="Amiri" pitchFamily="2" charset="-78"/>
+                <a:ea typeface="Amiri" pitchFamily="2" charset="-78"/>
                 <a:cs typeface="Amiri" pitchFamily="2" charset="-78"/>
               </a:rPr>
               <a:t>م</a:t>
@@ -17328,6 +17454,7 @@
                   <a:srgbClr val="8A6D1E"/>
                 </a:solidFill>
                 <a:latin typeface="Amiri" pitchFamily="2" charset="-78"/>
+                <a:ea typeface="Amiri" pitchFamily="2" charset="-78"/>
                 <a:cs typeface="Amiri" pitchFamily="2" charset="-78"/>
               </a:rPr>
               <a:t>عَادَاتِي وَصِحَّتِي وَرِحْلَاتِي</a:t>
@@ -17608,6 +17735,7 @@
                   <a:srgbClr val="1B3B6F"/>
                 </a:solidFill>
                 <a:latin typeface="Amiri" pitchFamily="2" charset="-78"/>
+                <a:ea typeface="Amiri" pitchFamily="2" charset="-78"/>
                 <a:cs typeface="Amiri" pitchFamily="2" charset="-78"/>
               </a:rPr>
               <a:t>يَوْمَ السَّبْتِ … وَيَوْمَ الأَحَدِ …</a:t>
@@ -17684,6 +17812,7 @@
                   <a:srgbClr val="1B3B6F"/>
                 </a:solidFill>
                 <a:latin typeface="Amiri" pitchFamily="2" charset="-78"/>
+                <a:ea typeface="Amiri" pitchFamily="2" charset="-78"/>
                 <a:cs typeface="Amiri" pitchFamily="2" charset="-78"/>
               </a:rPr>
               <a:t>مَاذَا فَعَلْتَ فِي نِهَايَةِ الأُسْبُوعِ المَاضِي؟</a:t>
@@ -17787,6 +17916,7 @@
                   <a:srgbClr val="1B3B6F"/>
                 </a:solidFill>
                 <a:latin typeface="Amiri" pitchFamily="2" charset="-78"/>
+                <a:ea typeface="Amiri" pitchFamily="2" charset="-78"/>
                 <a:cs typeface="Amiri" pitchFamily="2" charset="-78"/>
               </a:rPr>
               <a:t>إِلَى حَدٍّ مَا، لِأَنِّي … لٰكِنِّي …</a:t>
@@ -17863,6 +17993,7 @@
                   <a:srgbClr val="1B3B6F"/>
                 </a:solidFill>
                 <a:latin typeface="Amiri" pitchFamily="2" charset="-78"/>
+                <a:ea typeface="Amiri" pitchFamily="2" charset="-78"/>
                 <a:cs typeface="Amiri" pitchFamily="2" charset="-78"/>
               </a:rPr>
               <a:t>هَلْ أَكْلُكَ صِحِّيٌّ؟ لِمَاذَا؟</a:t>
@@ -17966,6 +18097,7 @@
                   <a:srgbClr val="1B3B6F"/>
                 </a:solidFill>
                 <a:latin typeface="Amiri" pitchFamily="2" charset="-78"/>
+                <a:ea typeface="Amiri" pitchFamily="2" charset="-78"/>
                 <a:cs typeface="Amiri" pitchFamily="2" charset="-78"/>
               </a:rPr>
               <a:t>يَجِبُ أَنْ … وَأَلَّا …</a:t>
@@ -18042,6 +18174,7 @@
                   <a:srgbClr val="1B3B6F"/>
                 </a:solidFill>
                 <a:latin typeface="Amiri" pitchFamily="2" charset="-78"/>
+                <a:ea typeface="Amiri" pitchFamily="2" charset="-78"/>
                 <a:cs typeface="Amiri" pitchFamily="2" charset="-78"/>
               </a:rPr>
               <a:t>مَا نَصِيحَتُكَ لِطَالِبٍ مُتْعَبٍ دَائِمًا؟</a:t>
@@ -18145,6 +18278,7 @@
                   <a:srgbClr val="1B3B6F"/>
                 </a:solidFill>
                 <a:latin typeface="Amiri" pitchFamily="2" charset="-78"/>
+                <a:ea typeface="Amiri" pitchFamily="2" charset="-78"/>
                 <a:cs typeface="Amiri" pitchFamily="2" charset="-78"/>
               </a:rPr>
               <a:t>الحَافِلَةُ أَسْرَعُ مِنْ … لٰكِنَّ الدَّرَّاجَةَ …</a:t>
@@ -18221,6 +18355,7 @@
                   <a:srgbClr val="1B3B6F"/>
                 </a:solidFill>
                 <a:latin typeface="Amiri" pitchFamily="2" charset="-78"/>
+                <a:ea typeface="Amiri" pitchFamily="2" charset="-78"/>
                 <a:cs typeface="Amiri" pitchFamily="2" charset="-78"/>
               </a:rPr>
               <a:t>قَارِنْ بَيْنَ الحَافِلَةِ وَالدَّرَّاجَةِ.</a:t>
@@ -18324,6 +18459,7 @@
                   <a:srgbClr val="1B3B6F"/>
                 </a:solidFill>
                 <a:latin typeface="Amiri" pitchFamily="2" charset="-78"/>
+                <a:ea typeface="Amiri" pitchFamily="2" charset="-78"/>
                 <a:cs typeface="Amiri" pitchFamily="2" charset="-78"/>
               </a:rPr>
               <a:t>إِذَا نَجَحْتُ … سَنُسَافِرُ …</a:t>
@@ -18400,6 +18536,7 @@
                   <a:srgbClr val="1B3B6F"/>
                 </a:solidFill>
                 <a:latin typeface="Amiri" pitchFamily="2" charset="-78"/>
+                <a:ea typeface="Amiri" pitchFamily="2" charset="-78"/>
                 <a:cs typeface="Amiri" pitchFamily="2" charset="-78"/>
               </a:rPr>
               <a:t>مَا خُطَطُكَ لِلصَّيْفِ القَادِمِ؟</a:t>
@@ -18609,6 +18746,7 @@
                   <a:srgbClr val="D4AF37"/>
                 </a:solidFill>
                 <a:latin typeface="Amiri" pitchFamily="2" charset="-78"/>
+                <a:ea typeface="Amiri" pitchFamily="2" charset="-78"/>
                 <a:cs typeface="Amiri" pitchFamily="2" charset="-78"/>
               </a:rPr>
               <a:t>م</a:t>
@@ -18929,6 +19067,7 @@
                   <a:srgbClr val="8A6D1E"/>
                 </a:solidFill>
                 <a:latin typeface="Amiri" pitchFamily="2" charset="-78"/>
+                <a:ea typeface="Amiri" pitchFamily="2" charset="-78"/>
                 <a:cs typeface="Amiri" pitchFamily="2" charset="-78"/>
               </a:rPr>
               <a:t>الحَيَاةُ العَصْرِيَّةُ</a:t>
@@ -19209,6 +19348,7 @@
                   <a:srgbClr val="1B3B6F"/>
                 </a:solidFill>
                 <a:latin typeface="Amiri" pitchFamily="2" charset="-78"/>
+                <a:ea typeface="Amiri" pitchFamily="2" charset="-78"/>
                 <a:cs typeface="Amiri" pitchFamily="2" charset="-78"/>
               </a:rPr>
               <a:t>كَانَ الشَّبَابُ … أَمَّا اليَوْمَ فَيَسْهَرُونَ …</a:t>
@@ -19285,6 +19425,7 @@
                   <a:srgbClr val="1B3B6F"/>
                 </a:solidFill>
                 <a:latin typeface="Amiri" pitchFamily="2" charset="-78"/>
+                <a:ea typeface="Amiri" pitchFamily="2" charset="-78"/>
                 <a:cs typeface="Amiri" pitchFamily="2" charset="-78"/>
               </a:rPr>
               <a:t>هَلْ تَغَيَّرَ رُوتِينُ الشَّبَابِ اليَوْمِيُّ عَنِ المَاضِي؟</a:t>
@@ -19388,6 +19529,7 @@
                   <a:srgbClr val="1B3B6F"/>
                 </a:solidFill>
                 <a:latin typeface="Amiri" pitchFamily="2" charset="-78"/>
+                <a:ea typeface="Amiri" pitchFamily="2" charset="-78"/>
                 <a:cs typeface="Amiri" pitchFamily="2" charset="-78"/>
               </a:rPr>
               <a:t>أَعْتَقِدُ أَنَّ أَهَمَّ شَيْءٍ … لِأَنَّ …</a:t>
@@ -19464,6 +19606,7 @@
                   <a:srgbClr val="1B3B6F"/>
                 </a:solidFill>
                 <a:latin typeface="Amiri" pitchFamily="2" charset="-78"/>
+                <a:ea typeface="Amiri" pitchFamily="2" charset="-78"/>
                 <a:cs typeface="Amiri" pitchFamily="2" charset="-78"/>
               </a:rPr>
               <a:t>مَا أَهَمُّ شَيْءٍ لِحَيَاةٍ صِحِّيَّةٍ فِي رَأْيِكَ؟</a:t>
@@ -19567,6 +19710,7 @@
                   <a:srgbClr val="1B3B6F"/>
                 </a:solidFill>
                 <a:latin typeface="Amiri" pitchFamily="2" charset="-78"/>
+                <a:ea typeface="Amiri" pitchFamily="2" charset="-78"/>
                 <a:cs typeface="Amiri" pitchFamily="2" charset="-78"/>
               </a:rPr>
               <a:t>صَحِيحٌ أَنَّهُ … غَيْرَ أَنَّ …</a:t>
@@ -19643,6 +19787,7 @@
                   <a:srgbClr val="1B3B6F"/>
                 </a:solidFill>
                 <a:latin typeface="Amiri" pitchFamily="2" charset="-78"/>
+                <a:ea typeface="Amiri" pitchFamily="2" charset="-78"/>
                 <a:cs typeface="Amiri" pitchFamily="2" charset="-78"/>
               </a:rPr>
               <a:t>هَلِ السَّفَرُ ضَرُورِيٌّ أَمْ رَفَاهِيَةٌ؟</a:t>
@@ -19746,6 +19891,7 @@
                   <a:srgbClr val="1B3B6F"/>
                 </a:solidFill>
                 <a:latin typeface="Amiri" pitchFamily="2" charset="-78"/>
+                <a:ea typeface="Amiri" pitchFamily="2" charset="-78"/>
                 <a:cs typeface="Amiri" pitchFamily="2" charset="-78"/>
               </a:rPr>
               <a:t>تَعَلَّمْتُ أَنَّ … وَلِذٰلِكَ سَأَمْشِي …</a:t>
@@ -19822,6 +19968,7 @@
                   <a:srgbClr val="1B3B6F"/>
                 </a:solidFill>
                 <a:latin typeface="Amiri" pitchFamily="2" charset="-78"/>
+                <a:ea typeface="Amiri" pitchFamily="2" charset="-78"/>
                 <a:cs typeface="Amiri" pitchFamily="2" charset="-78"/>
               </a:rPr>
               <a:t>مَا الدَّرْسُ الَّذِي تَعَلَّمْتَهُ مِنْ هٰذَا المِحْوَرِ؟</a:t>
@@ -19925,6 +20072,7 @@
                   <a:srgbClr val="1B3B6F"/>
                 </a:solidFill>
                 <a:latin typeface="Amiri" pitchFamily="2" charset="-78"/>
+                <a:ea typeface="Amiri" pitchFamily="2" charset="-78"/>
                 <a:cs typeface="Amiri" pitchFamily="2" charset="-78"/>
               </a:rPr>
               <a:t>لَوْ كَتَبْتُ …، لَبَدَأْتُهُ … ثُمَّ …</a:t>
@@ -20001,6 +20149,7 @@
                   <a:srgbClr val="1B3B6F"/>
                 </a:solidFill>
                 <a:latin typeface="Amiri" pitchFamily="2" charset="-78"/>
+                <a:ea typeface="Amiri" pitchFamily="2" charset="-78"/>
                 <a:cs typeface="Amiri" pitchFamily="2" charset="-78"/>
               </a:rPr>
               <a:t>لَوْ كَتَبْتَ يَوْمًا مِثَالِيًّا لِنَفْسِكَ، كَيْفَ يَكُونُ؟</a:t>
@@ -20210,6 +20359,7 @@
                   <a:srgbClr val="D4AF37"/>
                 </a:solidFill>
                 <a:latin typeface="Amiri" pitchFamily="2" charset="-78"/>
+                <a:ea typeface="Amiri" pitchFamily="2" charset="-78"/>
                 <a:cs typeface="Amiri" pitchFamily="2" charset="-78"/>
               </a:rPr>
               <a:t>م</a:t>
@@ -20530,6 +20680,7 @@
                   <a:srgbClr val="8A6D1E"/>
                 </a:solidFill>
                 <a:latin typeface="Amiri" pitchFamily="2" charset="-78"/>
+                <a:ea typeface="Amiri" pitchFamily="2" charset="-78"/>
                 <a:cs typeface="Amiri" pitchFamily="2" charset="-78"/>
               </a:rPr>
               <a:t>آدَابُ الصَّفِّ</a:t>
@@ -22061,6 +22212,7 @@
                   <a:srgbClr val="D4AF37"/>
                 </a:solidFill>
                 <a:latin typeface="Amiri" pitchFamily="2" charset="-78"/>
+                <a:ea typeface="Amiri" pitchFamily="2" charset="-78"/>
                 <a:cs typeface="Amiri" pitchFamily="2" charset="-78"/>
               </a:rPr>
               <a:t>م</a:t>
@@ -22381,6 +22533,7 @@
                   <a:srgbClr val="8A6D1E"/>
                 </a:solidFill>
                 <a:latin typeface="Amiri" pitchFamily="2" charset="-78"/>
+                <a:ea typeface="Amiri" pitchFamily="2" charset="-78"/>
                 <a:cs typeface="Amiri" pitchFamily="2" charset="-78"/>
               </a:rPr>
               <a:t>نَمُوذَجُ الإِجَابَةِ</a:t>
@@ -22623,6 +22776,7 @@
                   <a:srgbClr val="1B3B6F"/>
                 </a:solidFill>
                 <a:latin typeface="Amiri" pitchFamily="2" charset="-78"/>
+                <a:ea typeface="Amiri" pitchFamily="2" charset="-78"/>
                 <a:cs typeface="Amiri" pitchFamily="2" charset="-78"/>
               </a:rPr>
               <a:t>أَسْتَيْقِظُ فِي السَّابِعَةِ، ثُمَّ أَذْهَبُ إِلَى المَدْرَسَةِ، وَأَرْجِعُ فِي الثَّالِثَةِ.</a:t>
@@ -22699,6 +22853,7 @@
                   <a:srgbClr val="1B3B6F"/>
                 </a:solidFill>
                 <a:latin typeface="Amiri" pitchFamily="2" charset="-78"/>
+                <a:ea typeface="Amiri" pitchFamily="2" charset="-78"/>
                 <a:cs typeface="Amiri" pitchFamily="2" charset="-78"/>
               </a:rPr>
               <a:t>صِفْ يَوْمًا عَادِيًّا فِي حَيَاتِكَ.</a:t>
@@ -22802,6 +22957,7 @@
                   <a:srgbClr val="1B3B6F"/>
                 </a:solidFill>
                 <a:latin typeface="Amiri" pitchFamily="2" charset="-78"/>
+                <a:ea typeface="Amiri" pitchFamily="2" charset="-78"/>
                 <a:cs typeface="Amiri" pitchFamily="2" charset="-78"/>
               </a:rPr>
               <a:t>طَعَامِي المُفَضَّلُ هُوَ المَقْلُوبَةُ الَّتِي تَطْبُخُهَا جَدَّتِي.</a:t>
@@ -22878,6 +23034,7 @@
                   <a:srgbClr val="1B3B6F"/>
                 </a:solidFill>
                 <a:latin typeface="Amiri" pitchFamily="2" charset="-78"/>
+                <a:ea typeface="Amiri" pitchFamily="2" charset="-78"/>
                 <a:cs typeface="Amiri" pitchFamily="2" charset="-78"/>
               </a:rPr>
               <a:t>مَا طَعَامُكَ المُفَضَّلُ؟</a:t>
@@ -22981,6 +23138,7 @@
                   <a:srgbClr val="1B3B6F"/>
                 </a:solidFill>
                 <a:latin typeface="Amiri" pitchFamily="2" charset="-78"/>
+                <a:ea typeface="Amiri" pitchFamily="2" charset="-78"/>
                 <a:cs typeface="Amiri" pitchFamily="2" charset="-78"/>
               </a:rPr>
               <a:t>أُمَارِسُ الرِّيَاضَةَ ثَلَاثَ مَرَّاتٍ فِي الأُسْبُوعِ.</a:t>
@@ -23057,6 +23215,7 @@
                   <a:srgbClr val="1B3B6F"/>
                 </a:solidFill>
                 <a:latin typeface="Amiri" pitchFamily="2" charset="-78"/>
+                <a:ea typeface="Amiri" pitchFamily="2" charset="-78"/>
                 <a:cs typeface="Amiri" pitchFamily="2" charset="-78"/>
               </a:rPr>
               <a:t>كَمْ مَرَّةً تُمَارِسُ الرِّيَاضَةَ؟</a:t>
@@ -23160,6 +23319,7 @@
                   <a:srgbClr val="1B3B6F"/>
                 </a:solidFill>
                 <a:latin typeface="Amiri" pitchFamily="2" charset="-78"/>
+                <a:ea typeface="Amiri" pitchFamily="2" charset="-78"/>
                 <a:cs typeface="Amiri" pitchFamily="2" charset="-78"/>
               </a:rPr>
               <a:t>أَذْهَبُ بِالحَافِلَةِ، وَتَسْتَغْرِقُ الرِّحْلَةُ عِشْرِينَ دَقِيقَةً.</a:t>
@@ -23236,6 +23396,7 @@
                   <a:srgbClr val="1B3B6F"/>
                 </a:solidFill>
                 <a:latin typeface="Amiri" pitchFamily="2" charset="-78"/>
+                <a:ea typeface="Amiri" pitchFamily="2" charset="-78"/>
                 <a:cs typeface="Amiri" pitchFamily="2" charset="-78"/>
               </a:rPr>
               <a:t>كَيْفَ تَذْهَبُ إِلَى المَدْرَسَةِ؟</a:t>
@@ -23339,6 +23500,7 @@
                   <a:srgbClr val="1B3B6F"/>
                 </a:solidFill>
                 <a:latin typeface="Amiri" pitchFamily="2" charset="-78"/>
+                <a:ea typeface="Amiri" pitchFamily="2" charset="-78"/>
                 <a:cs typeface="Amiri" pitchFamily="2" charset="-78"/>
               </a:rPr>
               <a:t>قَضَيْتُ عُطْلَتِي فِي بَيْتِ جَدِّي فِي القَرْيَةِ.</a:t>
@@ -23415,6 +23577,7 @@
                   <a:srgbClr val="1B3B6F"/>
                 </a:solidFill>
                 <a:latin typeface="Amiri" pitchFamily="2" charset="-78"/>
+                <a:ea typeface="Amiri" pitchFamily="2" charset="-78"/>
                 <a:cs typeface="Amiri" pitchFamily="2" charset="-78"/>
               </a:rPr>
               <a:t>أَيْنَ قَضَيْتَ عُطْلَتَكَ الأَخِيرَةَ؟</a:t>
@@ -23624,6 +23787,7 @@
                   <a:srgbClr val="D4AF37"/>
                 </a:solidFill>
                 <a:latin typeface="Amiri" pitchFamily="2" charset="-78"/>
+                <a:ea typeface="Amiri" pitchFamily="2" charset="-78"/>
                 <a:cs typeface="Amiri" pitchFamily="2" charset="-78"/>
               </a:rPr>
               <a:t>م</a:t>
@@ -23944,6 +24108,7 @@
                   <a:srgbClr val="8A6D1E"/>
                 </a:solidFill>
                 <a:latin typeface="Amiri" pitchFamily="2" charset="-78"/>
+                <a:ea typeface="Amiri" pitchFamily="2" charset="-78"/>
                 <a:cs typeface="Amiri" pitchFamily="2" charset="-78"/>
               </a:rPr>
               <a:t>نَمُوذَجُ الإِجَابَةِ</a:t>
@@ -24186,6 +24351,7 @@
                   <a:srgbClr val="1B3B6F"/>
                 </a:solidFill>
                 <a:latin typeface="Amiri" pitchFamily="2" charset="-78"/>
+                <a:ea typeface="Amiri" pitchFamily="2" charset="-78"/>
                 <a:cs typeface="Amiri" pitchFamily="2" charset="-78"/>
               </a:rPr>
               <a:t>يَوْمَ السَّبْتِ لَعِبْتُ مُبَارَاةً، وَيَوْمَ الأَحَدِ تَغَدَّيْنَا فِي مَطْعَمٍ لُبْنَانِيٍّ، وَكَانَ الأَكْلُ لَذِيذًا جِدًّا.</a:t>
@@ -24262,6 +24428,7 @@
                   <a:srgbClr val="1B3B6F"/>
                 </a:solidFill>
                 <a:latin typeface="Amiri" pitchFamily="2" charset="-78"/>
+                <a:ea typeface="Amiri" pitchFamily="2" charset="-78"/>
                 <a:cs typeface="Amiri" pitchFamily="2" charset="-78"/>
               </a:rPr>
               <a:t>مَاذَا فَعَلْتَ فِي نِهَايَةِ الأُسْبُوعِ المَاضِي؟</a:t>
@@ -24365,6 +24532,7 @@
                   <a:srgbClr val="1B3B6F"/>
                 </a:solidFill>
                 <a:latin typeface="Amiri" pitchFamily="2" charset="-78"/>
+                <a:ea typeface="Amiri" pitchFamily="2" charset="-78"/>
                 <a:cs typeface="Amiri" pitchFamily="2" charset="-78"/>
               </a:rPr>
               <a:t>إِلَى حَدٍّ مَا، لِأَنِّي آكُلُ الخُضَارَ كُلَّ يَوْمٍ، لٰكِنِّي أَشْرَبُ المَشْرُوبَاتِ الغَازِيَّةَ أَحْيَانًا.</a:t>
@@ -24441,6 +24609,7 @@
                   <a:srgbClr val="1B3B6F"/>
                 </a:solidFill>
                 <a:latin typeface="Amiri" pitchFamily="2" charset="-78"/>
+                <a:ea typeface="Amiri" pitchFamily="2" charset="-78"/>
                 <a:cs typeface="Amiri" pitchFamily="2" charset="-78"/>
               </a:rPr>
               <a:t>هَلْ أَكْلُكَ صِحِّيٌّ؟ لِمَاذَا؟</a:t>
@@ -24544,6 +24713,7 @@
                   <a:srgbClr val="1B3B6F"/>
                 </a:solidFill>
                 <a:latin typeface="Amiri" pitchFamily="2" charset="-78"/>
+                <a:ea typeface="Amiri" pitchFamily="2" charset="-78"/>
                 <a:cs typeface="Amiri" pitchFamily="2" charset="-78"/>
               </a:rPr>
               <a:t>يَجِبُ أَنْ يَنَامَ ثَمَانِيَ سَاعَاتٍ، وَأَلَّا يَسْتَعْمِلَ الهَاتِفَ قَبْلَ النَّوْمِ.</a:t>
@@ -24620,6 +24790,7 @@
                   <a:srgbClr val="1B3B6F"/>
                 </a:solidFill>
                 <a:latin typeface="Amiri" pitchFamily="2" charset="-78"/>
+                <a:ea typeface="Amiri" pitchFamily="2" charset="-78"/>
                 <a:cs typeface="Amiri" pitchFamily="2" charset="-78"/>
               </a:rPr>
               <a:t>مَا نَصِيحَتُكَ لِطَالِبٍ مُتْعَبٍ دَائِمًا؟</a:t>
@@ -24723,6 +24894,7 @@
                   <a:srgbClr val="1B3B6F"/>
                 </a:solidFill>
                 <a:latin typeface="Amiri" pitchFamily="2" charset="-78"/>
+                <a:ea typeface="Amiri" pitchFamily="2" charset="-78"/>
                 <a:cs typeface="Amiri" pitchFamily="2" charset="-78"/>
               </a:rPr>
               <a:t>الحَافِلَةُ أَسْرَعُ مِنَ الدَّرَّاجَةِ فِي المَطَرِ، لٰكِنَّ الدَّرَّاجَةَ أَرْخَصُ وَأَفْضَلُ لِلصِّحَّةِ.</a:t>
@@ -24799,6 +24971,7 @@
                   <a:srgbClr val="1B3B6F"/>
                 </a:solidFill>
                 <a:latin typeface="Amiri" pitchFamily="2" charset="-78"/>
+                <a:ea typeface="Amiri" pitchFamily="2" charset="-78"/>
                 <a:cs typeface="Amiri" pitchFamily="2" charset="-78"/>
               </a:rPr>
               <a:t>قَارِنْ بَيْنَ الحَافِلَةِ وَالدَّرَّاجَةِ.</a:t>
@@ -24902,6 +25075,7 @@
                   <a:srgbClr val="1B3B6F"/>
                 </a:solidFill>
                 <a:latin typeface="Amiri" pitchFamily="2" charset="-78"/>
+                <a:ea typeface="Amiri" pitchFamily="2" charset="-78"/>
                 <a:cs typeface="Amiri" pitchFamily="2" charset="-78"/>
               </a:rPr>
               <a:t>إِذَا نَجَحْتُ فِي الامْتِحَانَاتِ، سَنُسَافِرُ إِلَى المَغْرِبِ، وَسَأَتَعَلَّمُ رُكُوبَ الأَمْوَاجِ.</a:t>
@@ -24978,6 +25152,7 @@
                   <a:srgbClr val="1B3B6F"/>
                 </a:solidFill>
                 <a:latin typeface="Amiri" pitchFamily="2" charset="-78"/>
+                <a:ea typeface="Amiri" pitchFamily="2" charset="-78"/>
                 <a:cs typeface="Amiri" pitchFamily="2" charset="-78"/>
               </a:rPr>
               <a:t>مَا خُطَطُكَ لِلصَّيْفِ القَادِمِ؟</a:t>
@@ -25187,6 +25362,7 @@
                   <a:srgbClr val="D4AF37"/>
                 </a:solidFill>
                 <a:latin typeface="Amiri" pitchFamily="2" charset="-78"/>
+                <a:ea typeface="Amiri" pitchFamily="2" charset="-78"/>
                 <a:cs typeface="Amiri" pitchFamily="2" charset="-78"/>
               </a:rPr>
               <a:t>م</a:t>
@@ -25507,6 +25683,7 @@
                   <a:srgbClr val="8A6D1E"/>
                 </a:solidFill>
                 <a:latin typeface="Amiri" pitchFamily="2" charset="-78"/>
+                <a:ea typeface="Amiri" pitchFamily="2" charset="-78"/>
                 <a:cs typeface="Amiri" pitchFamily="2" charset="-78"/>
               </a:rPr>
               <a:t>نَمُوذَجُ الإِجَابَةِ</a:t>
@@ -25749,6 +25926,7 @@
                   <a:srgbClr val="1B3B6F"/>
                 </a:solidFill>
                 <a:latin typeface="Amiri" pitchFamily="2" charset="-78"/>
+                <a:ea typeface="Amiri" pitchFamily="2" charset="-78"/>
                 <a:cs typeface="Amiri" pitchFamily="2" charset="-78"/>
               </a:rPr>
               <a:t>كَانَ الشَّبَابُ يَنَامُونَ مُبَكِّرًا وَيَلْعَبُونَ فِي الخَارِجِ، أَمَّا اليَوْمَ فَيَسْهَرُونَ عَلَى الشَّاشَاتِ حَتَّى مُنْتَصَفِ اللَّيْلِ.</a:t>
@@ -25825,6 +26003,7 @@
                   <a:srgbClr val="1B3B6F"/>
                 </a:solidFill>
                 <a:latin typeface="Amiri" pitchFamily="2" charset="-78"/>
+                <a:ea typeface="Amiri" pitchFamily="2" charset="-78"/>
                 <a:cs typeface="Amiri" pitchFamily="2" charset="-78"/>
               </a:rPr>
               <a:t>هَلْ تَغَيَّرَ رُوتِينُ الشَّبَابِ اليَوْمِيُّ عَنِ المَاضِي؟</a:t>
@@ -25928,6 +26107,7 @@
                   <a:srgbClr val="1B3B6F"/>
                 </a:solidFill>
                 <a:latin typeface="Amiri" pitchFamily="2" charset="-78"/>
+                <a:ea typeface="Amiri" pitchFamily="2" charset="-78"/>
                 <a:cs typeface="Amiri" pitchFamily="2" charset="-78"/>
               </a:rPr>
               <a:t>أَعْتَقِدُ أَنَّ أَهَمَّ شَيْءٍ هُوَ التَّوَازُنُ: نَوْمٌ كَافٍ، وَأَكْلٌ مُتَنَوِّعٌ، وَحَرَكَةٌ يَوْمِيَّةٌ، لِأَنَّ الجِسْمَ يَحْتَاجُ إِلَيْهَا كُلِّهَا.</a:t>
@@ -26004,6 +26184,7 @@
                   <a:srgbClr val="1B3B6F"/>
                 </a:solidFill>
                 <a:latin typeface="Amiri" pitchFamily="2" charset="-78"/>
+                <a:ea typeface="Amiri" pitchFamily="2" charset="-78"/>
                 <a:cs typeface="Amiri" pitchFamily="2" charset="-78"/>
               </a:rPr>
               <a:t>مَا أَهَمُّ شَيْءٍ لِحَيَاةٍ صِحِّيَّةٍ فِي رَأْيِكَ؟</a:t>
@@ -26107,6 +26288,7 @@
                   <a:srgbClr val="1B3B6F"/>
                 </a:solidFill>
                 <a:latin typeface="Amiri" pitchFamily="2" charset="-78"/>
+                <a:ea typeface="Amiri" pitchFamily="2" charset="-78"/>
                 <a:cs typeface="Amiri" pitchFamily="2" charset="-78"/>
               </a:rPr>
               <a:t>صَحِيحٌ أَنَّهُ غَالٍ أَحْيَانًا، غَيْرَ أَنَّهُ يُعَلِّمُنَا الصَّبْرَ وَاحْتِرَامَ الآخَرِينَ، وَهٰذَا ضَرُورِيٌّ لِكُلِّ إِنْسَانٍ.</a:t>
@@ -26183,6 +26365,7 @@
                   <a:srgbClr val="1B3B6F"/>
                 </a:solidFill>
                 <a:latin typeface="Amiri" pitchFamily="2" charset="-78"/>
+                <a:ea typeface="Amiri" pitchFamily="2" charset="-78"/>
                 <a:cs typeface="Amiri" pitchFamily="2" charset="-78"/>
               </a:rPr>
               <a:t>هَلِ السَّفَرُ ضَرُورِيٌّ أَمْ رَفَاهِيَةٌ؟</a:t>
@@ -26392,6 +26575,7 @@
                   <a:srgbClr val="D4AF37"/>
                 </a:solidFill>
                 <a:latin typeface="Amiri" pitchFamily="2" charset="-78"/>
+                <a:ea typeface="Amiri" pitchFamily="2" charset="-78"/>
                 <a:cs typeface="Amiri" pitchFamily="2" charset="-78"/>
               </a:rPr>
               <a:t>م</a:t>
@@ -26712,6 +26896,7 @@
                   <a:srgbClr val="8A6D1E"/>
                 </a:solidFill>
                 <a:latin typeface="Amiri" pitchFamily="2" charset="-78"/>
+                <a:ea typeface="Amiri" pitchFamily="2" charset="-78"/>
                 <a:cs typeface="Amiri" pitchFamily="2" charset="-78"/>
               </a:rPr>
               <a:t>نَمُوذَجُ الإِجَابَةِ</a:t>
@@ -26954,6 +27139,7 @@
                   <a:srgbClr val="1B3B6F"/>
                 </a:solidFill>
                 <a:latin typeface="Amiri" pitchFamily="2" charset="-78"/>
+                <a:ea typeface="Amiri" pitchFamily="2" charset="-78"/>
                 <a:cs typeface="Amiri" pitchFamily="2" charset="-78"/>
               </a:rPr>
               <a:t>تَعَلَّمْتُ أَنَّ عَادَاتِنَا الصَّغِيرَةَ تَصْنَعُ صِحَّتَنَا، وَلِذٰلِكَ سَأَمْشِي أَكْثَرَ وَأَنَامُ مُبَكِّرًا.</a:t>
@@ -27030,6 +27216,7 @@
                   <a:srgbClr val="1B3B6F"/>
                 </a:solidFill>
                 <a:latin typeface="Amiri" pitchFamily="2" charset="-78"/>
+                <a:ea typeface="Amiri" pitchFamily="2" charset="-78"/>
                 <a:cs typeface="Amiri" pitchFamily="2" charset="-78"/>
               </a:rPr>
               <a:t>مَا الدَّرْسُ الَّذِي تَعَلَّمْتَهُ مِنْ هٰذَا المِحْوَرِ؟</a:t>
@@ -27133,6 +27320,7 @@
                   <a:srgbClr val="1B3B6F"/>
                 </a:solidFill>
                 <a:latin typeface="Amiri" pitchFamily="2" charset="-78"/>
+                <a:ea typeface="Amiri" pitchFamily="2" charset="-78"/>
                 <a:cs typeface="Amiri" pitchFamily="2" charset="-78"/>
               </a:rPr>
               <a:t>لَوْ كَتَبْتُ يَوْمًا مِثَالِيًّا، لَبَدَأْتُهُ بِالسِّبَاحَةِ، ثُمَّ لَتَغَدَّيْتُ مَعَ أُسْرَتِي فِي مَطْعَمٍ عَلَى البَحْرِ، وَلَخَتَمْتُهُ بِكِتَابٍ جَيِّدٍ.</a:t>
@@ -27209,6 +27397,7 @@
                   <a:srgbClr val="1B3B6F"/>
                 </a:solidFill>
                 <a:latin typeface="Amiri" pitchFamily="2" charset="-78"/>
+                <a:ea typeface="Amiri" pitchFamily="2" charset="-78"/>
                 <a:cs typeface="Amiri" pitchFamily="2" charset="-78"/>
               </a:rPr>
               <a:t>لَوْ كَتَبْتَ يَوْمًا مِثَالِيًّا لِنَفْسِكَ، كَيْفَ يَكُونُ؟</a:t>
@@ -27418,6 +27607,7 @@
                   <a:srgbClr val="D4AF37"/>
                 </a:solidFill>
                 <a:latin typeface="Amiri" pitchFamily="2" charset="-78"/>
+                <a:ea typeface="Amiri" pitchFamily="2" charset="-78"/>
                 <a:cs typeface="Amiri" pitchFamily="2" charset="-78"/>
               </a:rPr>
               <a:t>م</a:t>
@@ -27738,6 +27928,7 @@
                   <a:srgbClr val="8A6D1E"/>
                 </a:solidFill>
                 <a:latin typeface="Amiri" pitchFamily="2" charset="-78"/>
+                <a:ea typeface="Amiri" pitchFamily="2" charset="-78"/>
                 <a:cs typeface="Amiri" pitchFamily="2" charset="-78"/>
               </a:rPr>
               <a:t>قَيِّمْ عَمَلَكَ</a:t>
@@ -28982,6 +29173,7 @@
                   <a:srgbClr val="FFFFFF"/>
                 </a:solidFill>
                 <a:latin typeface="Amiri" pitchFamily="2" charset="-78"/>
+                <a:ea typeface="Amiri" pitchFamily="2" charset="-78"/>
                 <a:cs typeface="Amiri" pitchFamily="2" charset="-78"/>
               </a:rPr>
               <a:t>أَحْسَنْتُمْ! إِلَى اللِّقَاءِ</a:t>
@@ -29134,6 +29326,7 @@
                   <a:srgbClr val="D4AF37"/>
                 </a:solidFill>
                 <a:latin typeface="Amiri" pitchFamily="2" charset="-78"/>
+                <a:ea typeface="Amiri" pitchFamily="2" charset="-78"/>
                 <a:cs typeface="Amiri" pitchFamily="2" charset="-78"/>
               </a:rPr>
               <a:t>وَرْشَةُ الكِتَابَةِ</a:t>
@@ -29267,6 +29460,7 @@
                   <a:srgbClr val="D4AF37"/>
                 </a:solidFill>
                 <a:latin typeface="Amiri" pitchFamily="2" charset="-78"/>
+                <a:ea typeface="Amiri" pitchFamily="2" charset="-78"/>
                 <a:cs typeface="Amiri" pitchFamily="2" charset="-78"/>
               </a:rPr>
               <a:t>م</a:t>
@@ -29587,6 +29781,7 @@
                   <a:srgbClr val="8A6D1E"/>
                 </a:solidFill>
                 <a:latin typeface="Amiri" pitchFamily="2" charset="-78"/>
+                <a:ea typeface="Amiri" pitchFamily="2" charset="-78"/>
                 <a:cs typeface="Amiri" pitchFamily="2" charset="-78"/>
               </a:rPr>
               <a:t>خَرِيطَةُ الوَرْشَةِ</a:t>
@@ -29901,6 +30096,7 @@
                   <a:srgbClr val="1B3B6F"/>
                 </a:solidFill>
                 <a:latin typeface="Amiri" pitchFamily="2" charset="-78"/>
+                <a:ea typeface="Amiri" pitchFamily="2" charset="-78"/>
                 <a:cs typeface="Amiri" pitchFamily="2" charset="-78"/>
               </a:rPr>
               <a:t>كَيْفَ</a:t>
@@ -30177,6 +30373,7 @@
                   <a:srgbClr val="1E6B52"/>
                 </a:solidFill>
                 <a:latin typeface="Amiri" pitchFamily="2" charset="-78"/>
+                <a:ea typeface="Amiri" pitchFamily="2" charset="-78"/>
                 <a:cs typeface="Amiri" pitchFamily="2" charset="-78"/>
               </a:rPr>
               <a:t>تَمْثِيلُ الدَّوْرِ</a:t>
@@ -30453,6 +30650,7 @@
                   <a:srgbClr val="8A6D1E"/>
                 </a:solidFill>
                 <a:latin typeface="Amiri" pitchFamily="2" charset="-78"/>
+                <a:ea typeface="Amiri" pitchFamily="2" charset="-78"/>
                 <a:cs typeface="Amiri" pitchFamily="2" charset="-78"/>
               </a:rPr>
               <a:t>النَّمُوذَجُ</a:t>
@@ -30729,6 +30927,7 @@
                   <a:srgbClr val="1E6B52"/>
                 </a:solidFill>
                 <a:latin typeface="Amiri" pitchFamily="2" charset="-78"/>
+                <a:ea typeface="Amiri" pitchFamily="2" charset="-78"/>
                 <a:cs typeface="Amiri" pitchFamily="2" charset="-78"/>
               </a:rPr>
               <a:t>المُحَادَثَةُ</a:t>
@@ -31005,6 +31204,7 @@
                   <a:srgbClr val="8A6D1E"/>
                 </a:solidFill>
                 <a:latin typeface="Amiri" pitchFamily="2" charset="-78"/>
+                <a:ea typeface="Amiri" pitchFamily="2" charset="-78"/>
                 <a:cs typeface="Amiri" pitchFamily="2" charset="-78"/>
               </a:rPr>
               <a:t>قَيِّمْ</a:t>
@@ -31248,6 +31448,7 @@
                   <a:srgbClr val="D4AF37"/>
                 </a:solidFill>
                 <a:latin typeface="Amiri" pitchFamily="2" charset="-78"/>
+                <a:ea typeface="Amiri" pitchFamily="2" charset="-78"/>
                 <a:cs typeface="Amiri" pitchFamily="2" charset="-78"/>
               </a:rPr>
               <a:t>م</a:t>
@@ -31568,6 +31769,7 @@
                   <a:srgbClr val="8A6D1E"/>
                 </a:solidFill>
                 <a:latin typeface="Amiri" pitchFamily="2" charset="-78"/>
+                <a:ea typeface="Amiri" pitchFamily="2" charset="-78"/>
                 <a:cs typeface="Amiri" pitchFamily="2" charset="-78"/>
               </a:rPr>
               <a:t>امْتِحَانُ التَّحَدُّثِ</a:t>
@@ -32192,6 +32394,7 @@
                   <a:srgbClr val="1B3B6F"/>
                 </a:solidFill>
                 <a:latin typeface="Amiri" pitchFamily="2" charset="-78"/>
+                <a:ea typeface="Amiri" pitchFamily="2" charset="-78"/>
                 <a:cs typeface="Amiri" pitchFamily="2" charset="-78"/>
               </a:rPr>
               <a:t>عَفْوًا، هَلْ يُمْكِنُ أَنْ تُعِيدَ السُّؤَالَ؟</a:t>
@@ -32291,6 +32494,7 @@
                   <a:srgbClr val="1B3B6F"/>
                 </a:solidFill>
                 <a:latin typeface="Amiri" pitchFamily="2" charset="-78"/>
+                <a:ea typeface="Amiri" pitchFamily="2" charset="-78"/>
                 <a:cs typeface="Amiri" pitchFamily="2" charset="-78"/>
               </a:rPr>
               <a:t>لَحْظَةً، دَعْنِي أُفَكِّرُ …</a:t>
@@ -32390,6 +32594,7 @@
                   <a:srgbClr val="1B3B6F"/>
                 </a:solidFill>
                 <a:latin typeface="Amiri" pitchFamily="2" charset="-78"/>
+                <a:ea typeface="Amiri" pitchFamily="2" charset="-78"/>
                 <a:cs typeface="Amiri" pitchFamily="2" charset="-78"/>
               </a:rPr>
               <a:t>أَقْصِدُ …</a:t>
@@ -32561,6 +32766,7 @@
                   <a:srgbClr val="D4AF37"/>
                 </a:solidFill>
                 <a:latin typeface="Amiri" pitchFamily="2" charset="-78"/>
+                <a:ea typeface="Amiri" pitchFamily="2" charset="-78"/>
                 <a:cs typeface="Amiri" pitchFamily="2" charset="-78"/>
               </a:rPr>
               <a:t>م</a:t>
@@ -32881,6 +33087,7 @@
                   <a:srgbClr val="8A6D1E"/>
                 </a:solidFill>
                 <a:latin typeface="Amiri" pitchFamily="2" charset="-78"/>
+                <a:ea typeface="Amiri" pitchFamily="2" charset="-78"/>
                 <a:cs typeface="Amiri" pitchFamily="2" charset="-78"/>
               </a:rPr>
               <a:t>المِحْوَرُ الأَوَّلُ فِي اثْنَتَيْ عَشْرَةَ بِنْيَةً</a:t>
@@ -33184,6 +33391,7 @@
                   <a:srgbClr val="1B3B6F"/>
                 </a:solidFill>
                 <a:latin typeface="Amiri" pitchFamily="2" charset="-78"/>
+                <a:ea typeface="Amiri" pitchFamily="2" charset="-78"/>
                 <a:cs typeface="Amiri" pitchFamily="2" charset="-78"/>
               </a:rPr>
               <a:t>أَسْتَيْقِظُ</a:t>
@@ -33341,6 +33549,7 @@
                   <a:srgbClr val="1B3B6F"/>
                 </a:solidFill>
                 <a:latin typeface="Amiri" pitchFamily="2" charset="-78"/>
+                <a:ea typeface="Amiri" pitchFamily="2" charset="-78"/>
                 <a:cs typeface="Amiri" pitchFamily="2" charset="-78"/>
               </a:rPr>
               <a:t>سَأَسْتَيْقِظُ</a:t>
@@ -33444,6 +33653,7 @@
                   <a:srgbClr val="1B3B6F"/>
                 </a:solidFill>
                 <a:latin typeface="Amiri" pitchFamily="2" charset="-78"/>
+                <a:ea typeface="Amiri" pitchFamily="2" charset="-78"/>
                 <a:cs typeface="Amiri" pitchFamily="2" charset="-78"/>
               </a:rPr>
               <a:t>اسْتَيْقَظْتُ</a:t>
@@ -33547,6 +33757,7 @@
                   <a:srgbClr val="1B3B6F"/>
                 </a:solidFill>
                 <a:latin typeface="Amiri" pitchFamily="2" charset="-78"/>
+                <a:ea typeface="Amiri" pitchFamily="2" charset="-78"/>
                 <a:cs typeface="Amiri" pitchFamily="2" charset="-78"/>
               </a:rPr>
               <a:t>يَسْتَيْقِظُ</a:t>
@@ -33812,6 +34023,7 @@
                   <a:srgbClr val="1B3B6F"/>
                 </a:solidFill>
                 <a:latin typeface="Amiri" pitchFamily="2" charset="-78"/>
+                <a:ea typeface="Amiri" pitchFamily="2" charset="-78"/>
                 <a:cs typeface="Amiri" pitchFamily="2" charset="-78"/>
               </a:rPr>
               <a:t>عَادَةً · أَحْيَانًا · أَبَدًا</a:t>
@@ -34131,6 +34343,7 @@
                   <a:srgbClr val="1B3B6F"/>
                 </a:solidFill>
                 <a:latin typeface="Amiri" pitchFamily="2" charset="-78"/>
+                <a:ea typeface="Amiri" pitchFamily="2" charset="-78"/>
                 <a:cs typeface="Amiri" pitchFamily="2" charset="-78"/>
               </a:rPr>
               <a:t>أَطْلُبُ</a:t>
@@ -34288,6 +34501,7 @@
                   <a:srgbClr val="1B3B6F"/>
                 </a:solidFill>
                 <a:latin typeface="Amiri" pitchFamily="2" charset="-78"/>
+                <a:ea typeface="Amiri" pitchFamily="2" charset="-78"/>
                 <a:cs typeface="Amiri" pitchFamily="2" charset="-78"/>
               </a:rPr>
               <a:t>نَطْلُبُ</a:t>
@@ -34391,6 +34605,7 @@
                   <a:srgbClr val="1B3B6F"/>
                 </a:solidFill>
                 <a:latin typeface="Amiri" pitchFamily="2" charset="-78"/>
+                <a:ea typeface="Amiri" pitchFamily="2" charset="-78"/>
                 <a:cs typeface="Amiri" pitchFamily="2" charset="-78"/>
               </a:rPr>
               <a:t>طَلَبْتُ</a:t>
@@ -34494,6 +34709,7 @@
                   <a:srgbClr val="1B3B6F"/>
                 </a:solidFill>
                 <a:latin typeface="Amiri" pitchFamily="2" charset="-78"/>
+                <a:ea typeface="Amiri" pitchFamily="2" charset="-78"/>
                 <a:cs typeface="Amiri" pitchFamily="2" charset="-78"/>
               </a:rPr>
               <a:t>يَطْلُبُ</a:t>
@@ -34759,6 +34975,7 @@
                   <a:srgbClr val="1B3B6F"/>
                 </a:solidFill>
                 <a:latin typeface="Amiri" pitchFamily="2" charset="-78"/>
+                <a:ea typeface="Amiri" pitchFamily="2" charset="-78"/>
                 <a:cs typeface="Amiri" pitchFamily="2" charset="-78"/>
               </a:rPr>
               <a:t>لَذِيذٌ</a:t>
@@ -34916,6 +35133,7 @@
                   <a:srgbClr val="1B3B6F"/>
                 </a:solidFill>
                 <a:latin typeface="Amiri" pitchFamily="2" charset="-78"/>
+                <a:ea typeface="Amiri" pitchFamily="2" charset="-78"/>
                 <a:cs typeface="Amiri" pitchFamily="2" charset="-78"/>
               </a:rPr>
               <a:t>أَلَذُّ</a:t>
@@ -35019,6 +35237,7 @@
                   <a:srgbClr val="1B3B6F"/>
                 </a:solidFill>
                 <a:latin typeface="Amiri" pitchFamily="2" charset="-78"/>
+                <a:ea typeface="Amiri" pitchFamily="2" charset="-78"/>
                 <a:cs typeface="Amiri" pitchFamily="2" charset="-78"/>
               </a:rPr>
               <a:t>لَذِيذَةٌ</a:t>
@@ -35122,6 +35341,7 @@
                   <a:srgbClr val="1B3B6F"/>
                 </a:solidFill>
                 <a:latin typeface="Amiri" pitchFamily="2" charset="-78"/>
+                <a:ea typeface="Amiri" pitchFamily="2" charset="-78"/>
                 <a:cs typeface="Amiri" pitchFamily="2" charset="-78"/>
               </a:rPr>
               <a:t>لَذِيذٌ</a:t>
@@ -35387,6 +35607,7 @@
                   <a:srgbClr val="1B3B6F"/>
                 </a:solidFill>
                 <a:latin typeface="Amiri" pitchFamily="2" charset="-78"/>
+                <a:ea typeface="Amiri" pitchFamily="2" charset="-78"/>
                 <a:cs typeface="Amiri" pitchFamily="2" charset="-78"/>
               </a:rPr>
               <a:t>يَجِبُ أَنْ …</a:t>
@@ -35544,6 +35765,7 @@
                   <a:srgbClr val="1B3B6F"/>
                 </a:solidFill>
                 <a:latin typeface="Amiri" pitchFamily="2" charset="-78"/>
+                <a:ea typeface="Amiri" pitchFamily="2" charset="-78"/>
                 <a:cs typeface="Amiri" pitchFamily="2" charset="-78"/>
               </a:rPr>
               <a:t>يَنْبَغِي أَنْ …</a:t>
@@ -35647,6 +35869,7 @@
                   <a:srgbClr val="1B3B6F"/>
                 </a:solidFill>
                 <a:latin typeface="Amiri" pitchFamily="2" charset="-78"/>
+                <a:ea typeface="Amiri" pitchFamily="2" charset="-78"/>
                 <a:cs typeface="Amiri" pitchFamily="2" charset="-78"/>
               </a:rPr>
               <a:t>يَجِبُ أَلَّا …</a:t>
@@ -35912,6 +36135,7 @@
                   <a:srgbClr val="1B3B6F"/>
                 </a:solidFill>
                 <a:latin typeface="Amiri" pitchFamily="2" charset="-78"/>
+                <a:ea typeface="Amiri" pitchFamily="2" charset="-78"/>
                 <a:cs typeface="Amiri" pitchFamily="2" charset="-78"/>
               </a:rPr>
               <a:t>يُؤْلِمُنِي …</a:t>
@@ -36069,6 +36293,7 @@
                   <a:srgbClr val="1B3B6F"/>
                 </a:solidFill>
                 <a:latin typeface="Amiri" pitchFamily="2" charset="-78"/>
+                <a:ea typeface="Amiri" pitchFamily="2" charset="-78"/>
                 <a:cs typeface="Amiri" pitchFamily="2" charset="-78"/>
               </a:rPr>
               <a:t>عِنْدِي …</a:t>
@@ -36172,6 +36397,7 @@
                   <a:srgbClr val="1B3B6F"/>
                 </a:solidFill>
                 <a:latin typeface="Amiri" pitchFamily="2" charset="-78"/>
+                <a:ea typeface="Amiri" pitchFamily="2" charset="-78"/>
                 <a:cs typeface="Amiri" pitchFamily="2" charset="-78"/>
               </a:rPr>
               <a:t>تُؤْلِمُنِي</a:t>
@@ -36305,6 +36531,7 @@
                   <a:srgbClr val="D4AF37"/>
                 </a:solidFill>
                 <a:latin typeface="Amiri" pitchFamily="2" charset="-78"/>
+                <a:ea typeface="Amiri" pitchFamily="2" charset="-78"/>
                 <a:cs typeface="Amiri" pitchFamily="2" charset="-78"/>
               </a:rPr>
               <a:t>م</a:t>
@@ -36625,6 +36852,7 @@
                   <a:srgbClr val="8A6D1E"/>
                 </a:solidFill>
                 <a:latin typeface="Amiri" pitchFamily="2" charset="-78"/>
+                <a:ea typeface="Amiri" pitchFamily="2" charset="-78"/>
                 <a:cs typeface="Amiri" pitchFamily="2" charset="-78"/>
               </a:rPr>
               <a:t>بِنْيَاتٌ تَرْفَعُ الدَّرَجَةَ</a:t>
@@ -36928,6 +37156,7 @@
                   <a:srgbClr val="1B3B6F"/>
                 </a:solidFill>
                 <a:latin typeface="Amiri" pitchFamily="2" charset="-78"/>
+                <a:ea typeface="Amiri" pitchFamily="2" charset="-78"/>
                 <a:cs typeface="Amiri" pitchFamily="2" charset="-78"/>
               </a:rPr>
               <a:t>نَصَحَنِي بِأَنْ …</a:t>
@@ -37085,6 +37314,7 @@
                   <a:srgbClr val="1B3B6F"/>
                 </a:solidFill>
                 <a:latin typeface="Amiri" pitchFamily="2" charset="-78"/>
+                <a:ea typeface="Amiri" pitchFamily="2" charset="-78"/>
                 <a:cs typeface="Amiri" pitchFamily="2" charset="-78"/>
               </a:rPr>
               <a:t>أَنْصَحُكَ</a:t>
@@ -37188,6 +37418,7 @@
                   <a:srgbClr val="1B3B6F"/>
                 </a:solidFill>
                 <a:latin typeface="Amiri" pitchFamily="2" charset="-78"/>
+                <a:ea typeface="Amiri" pitchFamily="2" charset="-78"/>
                 <a:cs typeface="Amiri" pitchFamily="2" charset="-78"/>
               </a:rPr>
               <a:t>نَصَحَتْنِي</a:t>
@@ -37453,6 +37684,7 @@
                   <a:srgbClr val="1B3B6F"/>
                 </a:solidFill>
                 <a:latin typeface="Amiri" pitchFamily="2" charset="-78"/>
+                <a:ea typeface="Amiri" pitchFamily="2" charset="-78"/>
                 <a:cs typeface="Amiri" pitchFamily="2" charset="-78"/>
               </a:rPr>
               <a:t>تَسْتَغْرِقُ الرِّحْلَةُ …</a:t>
@@ -37610,6 +37842,7 @@
                   <a:srgbClr val="1B3B6F"/>
                 </a:solidFill>
                 <a:latin typeface="Amiri" pitchFamily="2" charset="-78"/>
+                <a:ea typeface="Amiri" pitchFamily="2" charset="-78"/>
                 <a:cs typeface="Amiri" pitchFamily="2" charset="-78"/>
               </a:rPr>
               <a:t>سَتَسْتَغْرِقُ</a:t>
@@ -37713,6 +37946,7 @@
                   <a:srgbClr val="1B3B6F"/>
                 </a:solidFill>
                 <a:latin typeface="Amiri" pitchFamily="2" charset="-78"/>
+                <a:ea typeface="Amiri" pitchFamily="2" charset="-78"/>
                 <a:cs typeface="Amiri" pitchFamily="2" charset="-78"/>
               </a:rPr>
               <a:t>اسْتَغْرَقَتْ</a:t>
@@ -37978,6 +38212,7 @@
                   <a:srgbClr val="1B3B6F"/>
                 </a:solidFill>
                 <a:latin typeface="Amiri" pitchFamily="2" charset="-78"/>
+                <a:ea typeface="Amiri" pitchFamily="2" charset="-78"/>
                 <a:cs typeface="Amiri" pitchFamily="2" charset="-78"/>
               </a:rPr>
               <a:t>أَسْرَعُ مِنْ …</a:t>
@@ -38135,6 +38370,7 @@
                   <a:srgbClr val="1B3B6F"/>
                 </a:solidFill>
                 <a:latin typeface="Amiri" pitchFamily="2" charset="-78"/>
+                <a:ea typeface="Amiri" pitchFamily="2" charset="-78"/>
                 <a:cs typeface="Amiri" pitchFamily="2" charset="-78"/>
               </a:rPr>
               <a:t>أَفْضَلُ</a:t>
@@ -38238,6 +38474,7 @@
                   <a:srgbClr val="1B3B6F"/>
                 </a:solidFill>
                 <a:latin typeface="Amiri" pitchFamily="2" charset="-78"/>
+                <a:ea typeface="Amiri" pitchFamily="2" charset="-78"/>
                 <a:cs typeface="Amiri" pitchFamily="2" charset="-78"/>
               </a:rPr>
               <a:t>أَرْخَصُ</a:t>
@@ -38503,6 +38740,7 @@
                   <a:srgbClr val="1B3B6F"/>
                 </a:solidFill>
                 <a:latin typeface="Amiri" pitchFamily="2" charset="-78"/>
+                <a:ea typeface="Amiri" pitchFamily="2" charset="-78"/>
                 <a:cs typeface="Amiri" pitchFamily="2" charset="-78"/>
               </a:rPr>
               <a:t>سَافَرْنَا · نَزَلْنَا · زُرْنَا</a:t>
@@ -38822,6 +39060,7 @@
                   <a:srgbClr val="1B3B6F"/>
                 </a:solidFill>
                 <a:latin typeface="Amiri" pitchFamily="2" charset="-78"/>
+                <a:ea typeface="Amiri" pitchFamily="2" charset="-78"/>
                 <a:cs typeface="Amiri" pitchFamily="2" charset="-78"/>
               </a:rPr>
               <a:t>إِذَا نَجَحْتُ، سَأُسَافِرُ</a:t>
@@ -39141,6 +39380,7 @@
                   <a:srgbClr val="1B3B6F"/>
                 </a:solidFill>
                 <a:latin typeface="Amiri" pitchFamily="2" charset="-78"/>
+                <a:ea typeface="Amiri" pitchFamily="2" charset="-78"/>
                 <a:cs typeface="Amiri" pitchFamily="2" charset="-78"/>
               </a:rPr>
               <a:t>لَوْ كَانَ عِنْدِي وَقْتٌ، لَسَافَرْتُ</a:t>
@@ -39328,6 +39568,7 @@
                   <a:srgbClr val="D4AF37"/>
                 </a:solidFill>
                 <a:latin typeface="Amiri" pitchFamily="2" charset="-78"/>
+                <a:ea typeface="Amiri" pitchFamily="2" charset="-78"/>
                 <a:cs typeface="Amiri" pitchFamily="2" charset="-78"/>
               </a:rPr>
               <a:t>م</a:t>
@@ -39648,6 +39889,7 @@
                   <a:srgbClr val="8A6D1E"/>
                 </a:solidFill>
                 <a:latin typeface="Amiri" pitchFamily="2" charset="-78"/>
+                <a:ea typeface="Amiri" pitchFamily="2" charset="-78"/>
                 <a:cs typeface="Amiri" pitchFamily="2" charset="-78"/>
               </a:rPr>
               <a:t>فِي الغُرَفِ</a:t>
@@ -40824,6 +41066,7 @@
                   <a:srgbClr val="1B3B6F"/>
                 </a:solidFill>
                 <a:latin typeface="Amiri" pitchFamily="2" charset="-78"/>
+                <a:ea typeface="Amiri" pitchFamily="2" charset="-78"/>
                 <a:cs typeface="Amiri" pitchFamily="2" charset="-78"/>
               </a:rPr>
               <a:t>دَوْرُكَ!</a:t>
@@ -40900,6 +41143,7 @@
                   <a:srgbClr val="1B3B6F"/>
                 </a:solidFill>
                 <a:latin typeface="Amiri" pitchFamily="2" charset="-78"/>
+                <a:ea typeface="Amiri" pitchFamily="2" charset="-78"/>
                 <a:cs typeface="Amiri" pitchFamily="2" charset="-78"/>
               </a:rPr>
               <a:t>أَحْسَنْتَ! / أَحْسَنْتِ!</a:t>
@@ -40976,6 +41220,7 @@
                   <a:srgbClr val="1B3B6F"/>
                 </a:solidFill>
                 <a:latin typeface="Amiri" pitchFamily="2" charset="-78"/>
+                <a:ea typeface="Amiri" pitchFamily="2" charset="-78"/>
                 <a:cs typeface="Amiri" pitchFamily="2" charset="-78"/>
               </a:rPr>
               <a:t>تَكَلَّمْ أَكْثَرَ، مِنْ فَضْلِكَ</a:t>
@@ -41052,6 +41297,7 @@
                   <a:srgbClr val="1B3B6F"/>
                 </a:solidFill>
                 <a:latin typeface="Amiri" pitchFamily="2" charset="-78"/>
+                <a:ea typeface="Amiri" pitchFamily="2" charset="-78"/>
                 <a:cs typeface="Amiri" pitchFamily="2" charset="-78"/>
               </a:rPr>
               <a:t>لِمَاذَا؟</a:t>
@@ -41223,6 +41469,7 @@
                   <a:srgbClr val="D4AF37"/>
                 </a:solidFill>
                 <a:latin typeface="Amiri" pitchFamily="2" charset="-78"/>
+                <a:ea typeface="Amiri" pitchFamily="2" charset="-78"/>
                 <a:cs typeface="Amiri" pitchFamily="2" charset="-78"/>
               </a:rPr>
               <a:t>م</a:t>
@@ -41543,6 +41790,7 @@
                   <a:srgbClr val="8A6D1E"/>
                 </a:solidFill>
                 <a:latin typeface="Amiri" pitchFamily="2" charset="-78"/>
+                <a:ea typeface="Amiri" pitchFamily="2" charset="-78"/>
                 <a:cs typeface="Amiri" pitchFamily="2" charset="-78"/>
               </a:rPr>
               <a:t>مَعَ الأُسْرَةِ المُضِيفَةِ</a:t>
@@ -41823,6 +42071,7 @@
                   <a:srgbClr val="1B3B6F"/>
                 </a:solidFill>
                 <a:latin typeface="Amiri" pitchFamily="2" charset="-78"/>
+                <a:ea typeface="Amiri" pitchFamily="2" charset="-78"/>
                 <a:cs typeface="Amiri" pitchFamily="2" charset="-78"/>
               </a:rPr>
               <a:t>أَسْتَيْقِظُ عَادَةً فِي السَّاعَةِ …</a:t>
@@ -41899,6 +42148,7 @@
                   <a:srgbClr val="1B3B6F"/>
                 </a:solidFill>
                 <a:latin typeface="Amiri" pitchFamily="2" charset="-78"/>
+                <a:ea typeface="Amiri" pitchFamily="2" charset="-78"/>
                 <a:cs typeface="Amiri" pitchFamily="2" charset="-78"/>
               </a:rPr>
               <a:t>أَهْلًا وَسَهْلًا! فِي أَيِّ سَاعَةٍ تَسْتَيْقِظُ عَادَةً؟</a:t>
@@ -42067,6 +42317,7 @@
                   <a:srgbClr val="1B3B6F"/>
                 </a:solidFill>
                 <a:latin typeface="Amiri" pitchFamily="2" charset="-78"/>
+                <a:ea typeface="Amiri" pitchFamily="2" charset="-78"/>
                 <a:cs typeface="Amiri" pitchFamily="2" charset="-78"/>
               </a:rPr>
               <a:t>آكُلُ … وَأَشْرَبُ …</a:t>
@@ -42143,6 +42394,7 @@
                   <a:srgbClr val="1B3B6F"/>
                 </a:solidFill>
                 <a:latin typeface="Amiri" pitchFamily="2" charset="-78"/>
+                <a:ea typeface="Amiri" pitchFamily="2" charset="-78"/>
                 <a:cs typeface="Amiri" pitchFamily="2" charset="-78"/>
               </a:rPr>
               <a:t>مَاذَا تَأْكُلُ فِي الفُطُورِ؟</a:t>
@@ -42311,6 +42563,7 @@
                   <a:srgbClr val="1B3B6F"/>
                 </a:solidFill>
                 <a:latin typeface="Amiri" pitchFamily="2" charset="-78"/>
+                <a:ea typeface="Amiri" pitchFamily="2" charset="-78"/>
                 <a:cs typeface="Amiri" pitchFamily="2" charset="-78"/>
               </a:rPr>
               <a:t>لَا آكُلُ … لِأَنَّ …</a:t>
@@ -42387,6 +42640,7 @@
                   <a:srgbClr val="1B3B6F"/>
                 </a:solidFill>
                 <a:latin typeface="Amiri" pitchFamily="2" charset="-78"/>
+                <a:ea typeface="Amiri" pitchFamily="2" charset="-78"/>
                 <a:cs typeface="Amiri" pitchFamily="2" charset="-78"/>
               </a:rPr>
               <a:t>هَلْ هُنَاكَ طَعَامٌ لَا تَأْكُلُهُ؟</a:t>
@@ -42555,6 +42809,7 @@
                   <a:srgbClr val="1B3B6F"/>
                 </a:solidFill>
                 <a:latin typeface="Amiri" pitchFamily="2" charset="-78"/>
+                <a:ea typeface="Amiri" pitchFamily="2" charset="-78"/>
                 <a:cs typeface="Amiri" pitchFamily="2" charset="-78"/>
               </a:rPr>
               <a:t>سَافَرْتُ بِالطَّائِرَةِ … وَاسْتَغْرَقَتِ الرِّحْلَةُ …</a:t>
@@ -42631,6 +42886,7 @@
                   <a:srgbClr val="1B3B6F"/>
                 </a:solidFill>
                 <a:latin typeface="Amiri" pitchFamily="2" charset="-78"/>
+                <a:ea typeface="Amiri" pitchFamily="2" charset="-78"/>
                 <a:cs typeface="Amiri" pitchFamily="2" charset="-78"/>
               </a:rPr>
               <a:t>كَيْفَ كَانَتْ رِحْلَتُكَ إِلَى هُنَا؟</a:t>
@@ -42799,6 +43055,7 @@
                   <a:srgbClr val="1B3B6F"/>
                 </a:solidFill>
                 <a:latin typeface="Amiri" pitchFamily="2" charset="-78"/>
+                <a:ea typeface="Amiri" pitchFamily="2" charset="-78"/>
                 <a:cs typeface="Amiri" pitchFamily="2" charset="-78"/>
               </a:rPr>
               <a:t>أُرِيدُ أَنْ أَزُورَ …</a:t>
@@ -42875,6 +43132,7 @@
                   <a:srgbClr val="1B3B6F"/>
                 </a:solidFill>
                 <a:latin typeface="Amiri" pitchFamily="2" charset="-78"/>
+                <a:ea typeface="Amiri" pitchFamily="2" charset="-78"/>
                 <a:cs typeface="Amiri" pitchFamily="2" charset="-78"/>
               </a:rPr>
               <a:t>مَاذَا تُرِيدُ أَنْ تَفْعَلَ غَدًا؟</a:t>
@@ -43149,6 +43407,7 @@
                   <a:srgbClr val="D4AF37"/>
                 </a:solidFill>
                 <a:latin typeface="Amiri" pitchFamily="2" charset="-78"/>
+                <a:ea typeface="Amiri" pitchFamily="2" charset="-78"/>
                 <a:cs typeface="Amiri" pitchFamily="2" charset="-78"/>
               </a:rPr>
               <a:t>م</a:t>
@@ -43469,6 +43728,7 @@
                   <a:srgbClr val="8A6D1E"/>
                 </a:solidFill>
                 <a:latin typeface="Amiri" pitchFamily="2" charset="-78"/>
+                <a:ea typeface="Amiri" pitchFamily="2" charset="-78"/>
                 <a:cs typeface="Amiri" pitchFamily="2" charset="-78"/>
               </a:rPr>
               <a:t>فِي المَطْعَمِ</a:t>
@@ -43749,6 +44009,7 @@
                   <a:srgbClr val="1B3B6F"/>
                 </a:solidFill>
                 <a:latin typeface="Amiri" pitchFamily="2" charset="-78"/>
+                <a:ea typeface="Amiri" pitchFamily="2" charset="-78"/>
                 <a:cs typeface="Amiri" pitchFamily="2" charset="-78"/>
               </a:rPr>
               <a:t>طَاوِلَةٌ لِشَخْصَيْنِ، مِنْ فَضْلِكَ</a:t>
@@ -43825,6 +44086,7 @@
                   <a:srgbClr val="1B3B6F"/>
                 </a:solidFill>
                 <a:latin typeface="Amiri" pitchFamily="2" charset="-78"/>
+                <a:ea typeface="Amiri" pitchFamily="2" charset="-78"/>
                 <a:cs typeface="Amiri" pitchFamily="2" charset="-78"/>
               </a:rPr>
               <a:t>مَسَاءُ الخَيْرِ، طَاوِلَةٌ لِكَمْ شَخْصًا؟</a:t>
@@ -43993,6 +44255,7 @@
                   <a:srgbClr val="1B3B6F"/>
                 </a:solidFill>
                 <a:latin typeface="Amiri" pitchFamily="2" charset="-78"/>
+                <a:ea typeface="Amiri" pitchFamily="2" charset="-78"/>
                 <a:cs typeface="Amiri" pitchFamily="2" charset="-78"/>
               </a:rPr>
               <a:t>أُرِيدُ … وَ…</a:t>
@@ -44069,6 +44332,7 @@
                   <a:srgbClr val="1B3B6F"/>
                 </a:solidFill>
                 <a:latin typeface="Amiri" pitchFamily="2" charset="-78"/>
+                <a:ea typeface="Amiri" pitchFamily="2" charset="-78"/>
                 <a:cs typeface="Amiri" pitchFamily="2" charset="-78"/>
               </a:rPr>
               <a:t>مَاذَا تَطْلُبُ؟</a:t>
@@ -44237,6 +44501,7 @@
                   <a:srgbClr val="1B3B6F"/>
                 </a:solidFill>
                 <a:latin typeface="Amiri" pitchFamily="2" charset="-78"/>
+                <a:ea typeface="Amiri" pitchFamily="2" charset="-78"/>
                 <a:cs typeface="Amiri" pitchFamily="2" charset="-78"/>
               </a:rPr>
               <a:t>بَطْنُهُ يُؤْلِمُهُ … هَلْ عِنْدَكُمْ …؟</a:t>
@@ -44313,6 +44578,7 @@
                   <a:srgbClr val="1B3B6F"/>
                 </a:solidFill>
                 <a:latin typeface="Amiri" pitchFamily="2" charset="-78"/>
+                <a:ea typeface="Amiri" pitchFamily="2" charset="-78"/>
                 <a:cs typeface="Amiri" pitchFamily="2" charset="-78"/>
               </a:rPr>
               <a:t>وَصَدِيقُكَ؟</a:t>
@@ -44416,6 +44682,7 @@
                   <a:srgbClr val="1B3B6F"/>
                 </a:solidFill>
                 <a:latin typeface="Amiri" pitchFamily="2" charset="-78"/>
+                <a:ea typeface="Amiri" pitchFamily="2" charset="-78"/>
                 <a:cs typeface="Amiri" pitchFamily="2" charset="-78"/>
               </a:rPr>
               <a:t>لَا، شُكْرًا، لِأَنَّ …</a:t>
@@ -44492,6 +44759,7 @@
                   <a:srgbClr val="1B3B6F"/>
                 </a:solidFill>
                 <a:latin typeface="Amiri" pitchFamily="2" charset="-78"/>
+                <a:ea typeface="Amiri" pitchFamily="2" charset="-78"/>
                 <a:cs typeface="Amiri" pitchFamily="2" charset="-78"/>
               </a:rPr>
               <a:t>عِنْدَنَا شُورْبَةُ خُضَارٍ. هَلْ تُرِيدُ حَلْوَى بَعْدَ ذٰلِكَ؟</a:t>
@@ -44595,6 +44863,7 @@
                   <a:srgbClr val="1B3B6F"/>
                 </a:solidFill>
                 <a:latin typeface="Amiri" pitchFamily="2" charset="-78"/>
+                <a:ea typeface="Amiri" pitchFamily="2" charset="-78"/>
                 <a:cs typeface="Amiri" pitchFamily="2" charset="-78"/>
               </a:rPr>
               <a:t>نَعَمْ، فِي … وَكَانَ …</a:t>
@@ -44671,6 +44940,7 @@
                   <a:srgbClr val="1B3B6F"/>
                 </a:solidFill>
                 <a:latin typeface="Amiri" pitchFamily="2" charset="-78"/>
+                <a:ea typeface="Amiri" pitchFamily="2" charset="-78"/>
                 <a:cs typeface="Amiri" pitchFamily="2" charset="-78"/>
               </a:rPr>
               <a:t>هَلْ أَكَلْتُمْ عِنْدَنَا مِنْ قَبْلُ؟</a:t>
@@ -44845,13 +45115,9 @@
     <a:fontScheme name="Office">
       <a:majorFont>
         <a:latin typeface="Calibri Light" panose="020F0302020204030204"/>
-        <a:ea typeface=""/>
-        <a:cs typeface=""/>
-        <a:font script="Jpan" typeface="游ゴシック Light"/>
-        <a:font script="Hang" typeface="맑은 고딕"/>
-        <a:font script="Hans" typeface="等线 Light"/>
-        <a:font script="Hant" typeface="新細明體"/>
-        <a:font script="Arab" typeface="Times New Roman"/>
+        <a:ea typeface="Amiri" pitchFamily="2" charset="-78"/>
+        <a:cs typeface="Amiri" pitchFamily="2" charset="-78"/>
+        <a:font script="Arab" typeface="Amiri"/>
         <a:font script="Hebr" typeface="Times New Roman"/>
         <a:font script="Thai" typeface="Angsana New"/>
         <a:font script="Ethi" typeface="Nyala"/>
@@ -44897,13 +45163,9 @@
       </a:majorFont>
       <a:minorFont>
         <a:latin typeface="Calibri" panose="020F0502020204030204"/>
-        <a:ea typeface=""/>
-        <a:cs typeface=""/>
-        <a:font script="Jpan" typeface="游ゴシック"/>
-        <a:font script="Hang" typeface="맑은 고딕"/>
-        <a:font script="Hans" typeface="等线"/>
-        <a:font script="Hant" typeface="新細明體"/>
-        <a:font script="Arab" typeface="Arial"/>
+        <a:ea typeface="Amiri" pitchFamily="2" charset="-78"/>
+        <a:cs typeface="Amiri" pitchFamily="2" charset="-78"/>
+        <a:font script="Arab" typeface="Amiri"/>
         <a:font script="Hebr" typeface="Arial"/>
         <a:font script="Thai" typeface="Cordia New"/>
         <a:font script="Ethi" typeface="Nyala"/>
